--- a/p01/VR-A-Frame-introduction.pptx
+++ b/p01/VR-A-Frame-introduction.pptx
@@ -12,23 +12,16 @@
     <p:sldId id="270" r:id="rId6"/>
     <p:sldId id="283" r:id="rId7"/>
     <p:sldId id="271" r:id="rId8"/>
-    <p:sldId id="262" r:id="rId9"/>
-    <p:sldId id="260" r:id="rId10"/>
-    <p:sldId id="286" r:id="rId11"/>
-    <p:sldId id="263" r:id="rId12"/>
-    <p:sldId id="264" r:id="rId13"/>
-    <p:sldId id="265" r:id="rId14"/>
-    <p:sldId id="275" r:id="rId15"/>
-    <p:sldId id="287" r:id="rId16"/>
-    <p:sldId id="267" r:id="rId17"/>
-    <p:sldId id="273" r:id="rId18"/>
-    <p:sldId id="274" r:id="rId19"/>
-    <p:sldId id="266" r:id="rId20"/>
-    <p:sldId id="288" r:id="rId21"/>
-    <p:sldId id="290" r:id="rId22"/>
-    <p:sldId id="293" r:id="rId23"/>
-    <p:sldId id="268" r:id="rId24"/>
-    <p:sldId id="272" r:id="rId25"/>
+    <p:sldId id="260" r:id="rId9"/>
+    <p:sldId id="265" r:id="rId10"/>
+    <p:sldId id="287" r:id="rId11"/>
+    <p:sldId id="267" r:id="rId12"/>
+    <p:sldId id="273" r:id="rId13"/>
+    <p:sldId id="274" r:id="rId14"/>
+    <p:sldId id="290" r:id="rId15"/>
+    <p:sldId id="293" r:id="rId16"/>
+    <p:sldId id="268" r:id="rId17"/>
+    <p:sldId id="272" r:id="rId18"/>
   </p:sldIdLst>
   <p:sldSz cx="12192000" cy="6858000"/>
   <p:notesSz cx="6858000" cy="9144000"/>
@@ -3293,7 +3286,7 @@
           <a:p>
             <a:fld id="{846CE7D5-CF57-46EF-B807-FDD0502418D4}" type="datetimeFigureOut">
               <a:rPr lang="en-US" smtClean="0"/>
-              <a:t>5/30/2025</a:t>
+              <a:t>1/6/2026</a:t>
             </a:fld>
             <a:endParaRPr lang="en-US"/>
           </a:p>
@@ -3463,7 +3456,7 @@
           <a:p>
             <a:fld id="{846CE7D5-CF57-46EF-B807-FDD0502418D4}" type="datetimeFigureOut">
               <a:rPr lang="en-US" smtClean="0"/>
-              <a:t>5/30/2025</a:t>
+              <a:t>1/6/2026</a:t>
             </a:fld>
             <a:endParaRPr lang="en-US"/>
           </a:p>
@@ -3643,7 +3636,7 @@
           <a:p>
             <a:fld id="{846CE7D5-CF57-46EF-B807-FDD0502418D4}" type="datetimeFigureOut">
               <a:rPr lang="en-US" smtClean="0"/>
-              <a:t>5/30/2025</a:t>
+              <a:t>1/6/2026</a:t>
             </a:fld>
             <a:endParaRPr lang="en-US"/>
           </a:p>
@@ -3813,7 +3806,7 @@
           <a:p>
             <a:fld id="{846CE7D5-CF57-46EF-B807-FDD0502418D4}" type="datetimeFigureOut">
               <a:rPr lang="en-US" smtClean="0"/>
-              <a:t>5/30/2025</a:t>
+              <a:t>1/6/2026</a:t>
             </a:fld>
             <a:endParaRPr lang="en-US"/>
           </a:p>
@@ -4059,7 +4052,7 @@
           <a:p>
             <a:fld id="{846CE7D5-CF57-46EF-B807-FDD0502418D4}" type="datetimeFigureOut">
               <a:rPr lang="en-US" smtClean="0"/>
-              <a:t>5/30/2025</a:t>
+              <a:t>1/6/2026</a:t>
             </a:fld>
             <a:endParaRPr lang="en-US"/>
           </a:p>
@@ -4291,7 +4284,7 @@
           <a:p>
             <a:fld id="{846CE7D5-CF57-46EF-B807-FDD0502418D4}" type="datetimeFigureOut">
               <a:rPr lang="en-US" smtClean="0"/>
-              <a:t>5/30/2025</a:t>
+              <a:t>1/6/2026</a:t>
             </a:fld>
             <a:endParaRPr lang="en-US"/>
           </a:p>
@@ -4658,7 +4651,7 @@
           <a:p>
             <a:fld id="{846CE7D5-CF57-46EF-B807-FDD0502418D4}" type="datetimeFigureOut">
               <a:rPr lang="en-US" smtClean="0"/>
-              <a:t>5/30/2025</a:t>
+              <a:t>1/6/2026</a:t>
             </a:fld>
             <a:endParaRPr lang="en-US"/>
           </a:p>
@@ -4776,7 +4769,7 @@
           <a:p>
             <a:fld id="{846CE7D5-CF57-46EF-B807-FDD0502418D4}" type="datetimeFigureOut">
               <a:rPr lang="en-US" smtClean="0"/>
-              <a:t>5/30/2025</a:t>
+              <a:t>1/6/2026</a:t>
             </a:fld>
             <a:endParaRPr lang="en-US"/>
           </a:p>
@@ -4871,7 +4864,7 @@
           <a:p>
             <a:fld id="{846CE7D5-CF57-46EF-B807-FDD0502418D4}" type="datetimeFigureOut">
               <a:rPr lang="en-US" smtClean="0"/>
-              <a:t>5/30/2025</a:t>
+              <a:t>1/6/2026</a:t>
             </a:fld>
             <a:endParaRPr lang="en-US"/>
           </a:p>
@@ -5148,7 +5141,7 @@
           <a:p>
             <a:fld id="{846CE7D5-CF57-46EF-B807-FDD0502418D4}" type="datetimeFigureOut">
               <a:rPr lang="en-US" smtClean="0"/>
-              <a:t>5/30/2025</a:t>
+              <a:t>1/6/2026</a:t>
             </a:fld>
             <a:endParaRPr lang="en-US"/>
           </a:p>
@@ -5405,7 +5398,7 @@
           <a:p>
             <a:fld id="{846CE7D5-CF57-46EF-B807-FDD0502418D4}" type="datetimeFigureOut">
               <a:rPr lang="en-US" smtClean="0"/>
-              <a:t>5/30/2025</a:t>
+              <a:t>1/6/2026</a:t>
             </a:fld>
             <a:endParaRPr lang="en-US"/>
           </a:p>
@@ -5618,7 +5611,7 @@
           <a:p>
             <a:fld id="{846CE7D5-CF57-46EF-B807-FDD0502418D4}" type="datetimeFigureOut">
               <a:rPr lang="en-US" smtClean="0"/>
-              <a:t>5/30/2025</a:t>
+              <a:t>1/6/2026</a:t>
             </a:fld>
             <a:endParaRPr lang="en-US"/>
           </a:p>
@@ -7259,655 +7252,6 @@
           <p:cNvPr id="2" name="Title 1">
             <a:extLst>
               <a:ext uri="{FF2B5EF4-FFF2-40B4-BE49-F238E27FC236}">
-                <a16:creationId xmlns:a16="http://schemas.microsoft.com/office/drawing/2014/main" id="{4E8176D1-FB6F-C3E6-AA2B-6EEE7FE5C1B6}"/>
-              </a:ext>
-            </a:extLst>
-          </p:cNvPr>
-          <p:cNvSpPr>
-            <a:spLocks noGrp="1"/>
-          </p:cNvSpPr>
-          <p:nvPr>
-            <p:ph type="title"/>
-          </p:nvPr>
-        </p:nvSpPr>
-        <p:spPr/>
-        <p:txBody>
-          <a:bodyPr/>
-          <a:lstStyle/>
-          <a:p>
-            <a:r>
-              <a:rPr lang="en-US" dirty="0"/>
-              <a:t>Sign up for glitch</a:t>
-            </a:r>
-          </a:p>
-        </p:txBody>
-      </p:sp>
-      <p:sp>
-        <p:nvSpPr>
-          <p:cNvPr id="3" name="Content Placeholder 2">
-            <a:extLst>
-              <a:ext uri="{FF2B5EF4-FFF2-40B4-BE49-F238E27FC236}">
-                <a16:creationId xmlns:a16="http://schemas.microsoft.com/office/drawing/2014/main" id="{3813D28B-E2CC-D068-ADD0-37F62BCF8613}"/>
-              </a:ext>
-            </a:extLst>
-          </p:cNvPr>
-          <p:cNvSpPr>
-            <a:spLocks noGrp="1"/>
-          </p:cNvSpPr>
-          <p:nvPr>
-            <p:ph idx="1"/>
-          </p:nvPr>
-        </p:nvSpPr>
-        <p:spPr/>
-        <p:txBody>
-          <a:bodyPr/>
-          <a:lstStyle/>
-          <a:p>
-            <a:pPr marL="0" indent="0">
-              <a:buNone/>
-            </a:pPr>
-            <a:r>
-              <a:rPr lang="en-US" dirty="0"/>
-              <a:t>Glitch can stand alone or can be hooked to via google</a:t>
-            </a:r>
-          </a:p>
-          <a:p>
-            <a:pPr marL="0" indent="0">
-              <a:buNone/>
-            </a:pPr>
-            <a:endParaRPr lang="en-US" dirty="0"/>
-          </a:p>
-          <a:p>
-            <a:pPr marL="0" indent="0">
-              <a:buNone/>
-            </a:pPr>
-            <a:r>
-              <a:rPr lang="en-US" dirty="0"/>
-              <a:t>Sign up on </a:t>
-            </a:r>
-            <a:r>
-              <a:rPr lang="en-US" b="1" dirty="0"/>
-              <a:t>glitch</a:t>
-            </a:r>
-            <a:r>
-              <a:rPr lang="en-US" dirty="0"/>
-              <a:t> </a:t>
-            </a:r>
-          </a:p>
-          <a:p>
-            <a:pPr marL="0" indent="0">
-              <a:buNone/>
-            </a:pPr>
-            <a:r>
-              <a:rPr lang="en-US" dirty="0"/>
-              <a:t>	The same account on your laptop and your phone</a:t>
-            </a:r>
-          </a:p>
-          <a:p>
-            <a:pPr marL="0" indent="0">
-              <a:buNone/>
-            </a:pPr>
-            <a:endParaRPr lang="en-US" dirty="0"/>
-          </a:p>
-          <a:p>
-            <a:pPr marL="0" indent="0">
-              <a:buNone/>
-            </a:pPr>
-            <a:r>
-              <a:rPr lang="en-US" dirty="0"/>
-              <a:t>Changes in </a:t>
-            </a:r>
-            <a:r>
-              <a:rPr lang="en-US" b="1" dirty="0"/>
-              <a:t>glitch</a:t>
-            </a:r>
-            <a:r>
-              <a:rPr lang="en-US" dirty="0"/>
-              <a:t> on your laptop will be seen on your phone</a:t>
-            </a:r>
-          </a:p>
-        </p:txBody>
-      </p:sp>
-    </p:spTree>
-    <p:extLst>
-      <p:ext uri="{BB962C8B-B14F-4D97-AF65-F5344CB8AC3E}">
-        <p14:creationId xmlns:p14="http://schemas.microsoft.com/office/powerpoint/2010/main" val="3239428708"/>
-      </p:ext>
-    </p:extLst>
-  </p:cSld>
-  <p:clrMapOvr>
-    <a:masterClrMapping/>
-  </p:clrMapOvr>
-</p:sld>
-</file>
-
-<file path=ppt/slides/slide11.xml><?xml version="1.0" encoding="utf-8"?>
-<p:sld xmlns:a="http://schemas.openxmlformats.org/drawingml/2006/main" xmlns:r="http://schemas.openxmlformats.org/officeDocument/2006/relationships" xmlns:p="http://schemas.openxmlformats.org/presentationml/2006/main">
-  <p:cSld>
-    <p:spTree>
-      <p:nvGrpSpPr>
-        <p:cNvPr id="1" name=""/>
-        <p:cNvGrpSpPr/>
-        <p:nvPr/>
-      </p:nvGrpSpPr>
-      <p:grpSpPr>
-        <a:xfrm>
-          <a:off x="0" y="0"/>
-          <a:ext cx="0" cy="0"/>
-          <a:chOff x="0" y="0"/>
-          <a:chExt cx="0" cy="0"/>
-        </a:xfrm>
-      </p:grpSpPr>
-      <p:sp>
-        <p:nvSpPr>
-          <p:cNvPr id="2" name="Title 1">
-            <a:extLst>
-              <a:ext uri="{FF2B5EF4-FFF2-40B4-BE49-F238E27FC236}">
-                <a16:creationId xmlns:a16="http://schemas.microsoft.com/office/drawing/2014/main" id="{456D0A98-2AE8-2D1F-93B0-BDE01220CC00}"/>
-              </a:ext>
-            </a:extLst>
-          </p:cNvPr>
-          <p:cNvSpPr>
-            <a:spLocks noGrp="1"/>
-          </p:cNvSpPr>
-          <p:nvPr>
-            <p:ph type="title"/>
-          </p:nvPr>
-        </p:nvSpPr>
-        <p:spPr/>
-        <p:txBody>
-          <a:bodyPr/>
-          <a:lstStyle/>
-          <a:p>
-            <a:r>
-              <a:rPr lang="en-US" b="1" dirty="0">
-                <a:solidFill>
-                  <a:schemeClr val="accent5">
-                    <a:lumMod val="75000"/>
-                  </a:schemeClr>
-                </a:solidFill>
-                <a:ea typeface="Calibri" panose="020F0502020204030204"/>
-                <a:cs typeface="Calibri" panose="020F0502020204030204"/>
-              </a:rPr>
-              <a:t>Using A-frame  in glitch</a:t>
-            </a:r>
-            <a:endParaRPr lang="en-US" b="1" dirty="0">
-              <a:solidFill>
-                <a:schemeClr val="accent5">
-                  <a:lumMod val="75000"/>
-                </a:schemeClr>
-              </a:solidFill>
-            </a:endParaRPr>
-          </a:p>
-        </p:txBody>
-      </p:sp>
-      <p:sp>
-        <p:nvSpPr>
-          <p:cNvPr id="3" name="Content Placeholder 2">
-            <a:extLst>
-              <a:ext uri="{FF2B5EF4-FFF2-40B4-BE49-F238E27FC236}">
-                <a16:creationId xmlns:a16="http://schemas.microsoft.com/office/drawing/2014/main" id="{A44B0558-2DFD-1754-AFCA-9008E9C9ECE5}"/>
-              </a:ext>
-            </a:extLst>
-          </p:cNvPr>
-          <p:cNvSpPr>
-            <a:spLocks noGrp="1"/>
-          </p:cNvSpPr>
-          <p:nvPr>
-            <p:ph idx="1"/>
-          </p:nvPr>
-        </p:nvSpPr>
-        <p:spPr/>
-        <p:txBody>
-          <a:bodyPr/>
-          <a:lstStyle/>
-          <a:p>
-            <a:pPr marL="0" indent="0">
-              <a:buNone/>
-            </a:pPr>
-            <a:r>
-              <a:rPr lang="en-US" dirty="0"/>
-              <a:t>Once you create a glitch.com account</a:t>
-            </a:r>
-          </a:p>
-          <a:p>
-            <a:pPr marL="0" indent="0">
-              <a:buNone/>
-            </a:pPr>
-            <a:r>
-              <a:rPr lang="en-US" dirty="0"/>
-              <a:t>	access A-frame as a new project</a:t>
-            </a:r>
-          </a:p>
-          <a:p>
-            <a:pPr marL="0" indent="0">
-              <a:buNone/>
-            </a:pPr>
-            <a:endParaRPr lang="en-US" dirty="0"/>
-          </a:p>
-          <a:p>
-            <a:pPr marL="0" indent="0">
-              <a:buNone/>
-            </a:pPr>
-            <a:r>
-              <a:rPr lang="en-US" dirty="0"/>
-              <a:t>New Project</a:t>
-            </a:r>
-          </a:p>
-          <a:p>
-            <a:pPr marL="0" indent="0">
-              <a:buNone/>
-            </a:pPr>
-            <a:endParaRPr lang="en-US" dirty="0"/>
-          </a:p>
-        </p:txBody>
-      </p:sp>
-      <p:pic>
-        <p:nvPicPr>
-          <p:cNvPr id="5" name="Picture 4">
-            <a:extLst>
-              <a:ext uri="{FF2B5EF4-FFF2-40B4-BE49-F238E27FC236}">
-                <a16:creationId xmlns:a16="http://schemas.microsoft.com/office/drawing/2014/main" id="{E23BB1ED-5AA0-E63A-4344-4ED6C3EEB740}"/>
-              </a:ext>
-            </a:extLst>
-          </p:cNvPr>
-          <p:cNvPicPr>
-            <a:picLocks noChangeAspect="1"/>
-          </p:cNvPicPr>
-          <p:nvPr/>
-        </p:nvPicPr>
-        <p:blipFill>
-          <a:blip r:embed="rId2"/>
-          <a:stretch>
-            <a:fillRect/>
-          </a:stretch>
-        </p:blipFill>
-        <p:spPr>
-          <a:xfrm>
-            <a:off x="1910542" y="4146284"/>
-            <a:ext cx="8370915" cy="2030679"/>
-          </a:xfrm>
-          <a:prstGeom prst="rect">
-            <a:avLst/>
-          </a:prstGeom>
-        </p:spPr>
-      </p:pic>
-      <p:cxnSp>
-        <p:nvCxnSpPr>
-          <p:cNvPr id="7" name="Straight Arrow Connector 6">
-            <a:extLst>
-              <a:ext uri="{FF2B5EF4-FFF2-40B4-BE49-F238E27FC236}">
-                <a16:creationId xmlns:a16="http://schemas.microsoft.com/office/drawing/2014/main" id="{6CD0A453-04E5-E819-080A-88833E88F637}"/>
-              </a:ext>
-            </a:extLst>
-          </p:cNvPr>
-          <p:cNvCxnSpPr>
-            <a:cxnSpLocks/>
-          </p:cNvCxnSpPr>
-          <p:nvPr/>
-        </p:nvCxnSpPr>
-        <p:spPr>
-          <a:xfrm flipH="1">
-            <a:off x="8412549" y="2390274"/>
-            <a:ext cx="202062" cy="2130786"/>
-          </a:xfrm>
-          <a:prstGeom prst="straightConnector1">
-            <a:avLst/>
-          </a:prstGeom>
-          <a:ln w="57150">
-            <a:solidFill>
-              <a:srgbClr val="FF0000"/>
-            </a:solidFill>
-            <a:tailEnd type="triangle"/>
-          </a:ln>
-        </p:spPr>
-        <p:style>
-          <a:lnRef idx="3">
-            <a:schemeClr val="accent2"/>
-          </a:lnRef>
-          <a:fillRef idx="0">
-            <a:schemeClr val="accent2"/>
-          </a:fillRef>
-          <a:effectRef idx="2">
-            <a:schemeClr val="accent2"/>
-          </a:effectRef>
-          <a:fontRef idx="minor">
-            <a:schemeClr val="tx1"/>
-          </a:fontRef>
-        </p:style>
-      </p:cxnSp>
-    </p:spTree>
-    <p:extLst>
-      <p:ext uri="{BB962C8B-B14F-4D97-AF65-F5344CB8AC3E}">
-        <p14:creationId xmlns:p14="http://schemas.microsoft.com/office/powerpoint/2010/main" val="1535590936"/>
-      </p:ext>
-    </p:extLst>
-  </p:cSld>
-  <p:clrMapOvr>
-    <a:masterClrMapping/>
-  </p:clrMapOvr>
-</p:sld>
-</file>
-
-<file path=ppt/slides/slide12.xml><?xml version="1.0" encoding="utf-8"?>
-<p:sld xmlns:a="http://schemas.openxmlformats.org/drawingml/2006/main" xmlns:r="http://schemas.openxmlformats.org/officeDocument/2006/relationships" xmlns:p="http://schemas.openxmlformats.org/presentationml/2006/main">
-  <p:cSld>
-    <p:spTree>
-      <p:nvGrpSpPr>
-        <p:cNvPr id="1" name=""/>
-        <p:cNvGrpSpPr/>
-        <p:nvPr/>
-      </p:nvGrpSpPr>
-      <p:grpSpPr>
-        <a:xfrm>
-          <a:off x="0" y="0"/>
-          <a:ext cx="0" cy="0"/>
-          <a:chOff x="0" y="0"/>
-          <a:chExt cx="0" cy="0"/>
-        </a:xfrm>
-      </p:grpSpPr>
-      <p:sp>
-        <p:nvSpPr>
-          <p:cNvPr id="2" name="Title 1">
-            <a:extLst>
-              <a:ext uri="{FF2B5EF4-FFF2-40B4-BE49-F238E27FC236}">
-                <a16:creationId xmlns:a16="http://schemas.microsoft.com/office/drawing/2014/main" id="{1A9F62C2-1E3C-5315-92D8-46924F5360F9}"/>
-              </a:ext>
-            </a:extLst>
-          </p:cNvPr>
-          <p:cNvSpPr>
-            <a:spLocks noGrp="1"/>
-          </p:cNvSpPr>
-          <p:nvPr>
-            <p:ph type="title"/>
-          </p:nvPr>
-        </p:nvSpPr>
-        <p:spPr/>
-        <p:txBody>
-          <a:bodyPr/>
-          <a:lstStyle/>
-          <a:p>
-            <a:r>
-              <a:rPr lang="en-US" b="1" dirty="0">
-                <a:solidFill>
-                  <a:schemeClr val="accent5">
-                    <a:lumMod val="75000"/>
-                  </a:schemeClr>
-                </a:solidFill>
-                <a:ea typeface="Calibri" panose="020F0502020204030204"/>
-                <a:cs typeface="Calibri" panose="020F0502020204030204"/>
-              </a:rPr>
-              <a:t>Glitch Hello Website</a:t>
-            </a:r>
-            <a:endParaRPr lang="en-US" dirty="0"/>
-          </a:p>
-        </p:txBody>
-      </p:sp>
-      <p:sp>
-        <p:nvSpPr>
-          <p:cNvPr id="3" name="Content Placeholder 2">
-            <a:extLst>
-              <a:ext uri="{FF2B5EF4-FFF2-40B4-BE49-F238E27FC236}">
-                <a16:creationId xmlns:a16="http://schemas.microsoft.com/office/drawing/2014/main" id="{03721901-E9FD-CD6A-945E-FC635D287E08}"/>
-              </a:ext>
-            </a:extLst>
-          </p:cNvPr>
-          <p:cNvSpPr>
-            <a:spLocks noGrp="1"/>
-          </p:cNvSpPr>
-          <p:nvPr>
-            <p:ph idx="1"/>
-          </p:nvPr>
-        </p:nvSpPr>
-        <p:spPr/>
-        <p:txBody>
-          <a:bodyPr/>
-          <a:lstStyle/>
-          <a:p>
-            <a:pPr marL="0" indent="0">
-              <a:buNone/>
-            </a:pPr>
-            <a:r>
-              <a:rPr lang="en-US" dirty="0"/>
-              <a:t>Select</a:t>
-            </a:r>
-            <a:endParaRPr lang="en-US" dirty="0">
-              <a:highlight>
-                <a:srgbClr val="00FFFF"/>
-              </a:highlight>
-            </a:endParaRPr>
-          </a:p>
-          <a:p>
-            <a:pPr marL="0" indent="0">
-              <a:buNone/>
-            </a:pPr>
-            <a:endParaRPr lang="en-US" dirty="0"/>
-          </a:p>
-          <a:p>
-            <a:pPr marL="0" indent="0">
-              <a:buNone/>
-            </a:pPr>
-            <a:r>
-              <a:rPr lang="en-US" dirty="0"/>
-              <a:t>Select glitch-hello-website </a:t>
-            </a:r>
-          </a:p>
-          <a:p>
-            <a:pPr marL="0" indent="0">
-              <a:buNone/>
-            </a:pPr>
-            <a:endParaRPr lang="en-US" dirty="0"/>
-          </a:p>
-          <a:p>
-            <a:pPr marL="0" indent="0">
-              <a:buNone/>
-            </a:pPr>
-            <a:endParaRPr lang="en-US" dirty="0"/>
-          </a:p>
-        </p:txBody>
-      </p:sp>
-      <p:pic>
-        <p:nvPicPr>
-          <p:cNvPr id="6" name="Picture 5">
-            <a:extLst>
-              <a:ext uri="{FF2B5EF4-FFF2-40B4-BE49-F238E27FC236}">
-                <a16:creationId xmlns:a16="http://schemas.microsoft.com/office/drawing/2014/main" id="{A1BE51B0-EB55-1D3D-9348-7D4953BBEF8A}"/>
-              </a:ext>
-            </a:extLst>
-          </p:cNvPr>
-          <p:cNvPicPr>
-            <a:picLocks noChangeAspect="1"/>
-          </p:cNvPicPr>
-          <p:nvPr/>
-        </p:nvPicPr>
-        <p:blipFill rotWithShape="1">
-          <a:blip r:embed="rId2"/>
-          <a:srcRect l="8549" t="2283" r="11488" b="2195"/>
-          <a:stretch/>
-        </p:blipFill>
-        <p:spPr>
-          <a:xfrm>
-            <a:off x="7843520" y="131153"/>
-            <a:ext cx="2829560" cy="6595693"/>
-          </a:xfrm>
-          <a:prstGeom prst="rect">
-            <a:avLst/>
-          </a:prstGeom>
-        </p:spPr>
-      </p:pic>
-      <p:sp>
-        <p:nvSpPr>
-          <p:cNvPr id="7" name="Rectangle: Rounded Corners 6">
-            <a:extLst>
-              <a:ext uri="{FF2B5EF4-FFF2-40B4-BE49-F238E27FC236}">
-                <a16:creationId xmlns:a16="http://schemas.microsoft.com/office/drawing/2014/main" id="{BA5A38BC-5E90-E4B3-CA74-ADF369105160}"/>
-              </a:ext>
-            </a:extLst>
-          </p:cNvPr>
-          <p:cNvSpPr/>
-          <p:nvPr/>
-        </p:nvSpPr>
-        <p:spPr>
-          <a:xfrm>
-            <a:off x="1961804" y="1825625"/>
-            <a:ext cx="1542011" cy="448887"/>
-          </a:xfrm>
-          <a:prstGeom prst="roundRect">
-            <a:avLst/>
-          </a:prstGeom>
-          <a:solidFill>
-            <a:srgbClr val="50FFD3">
-              <a:alpha val="60000"/>
-            </a:srgbClr>
-          </a:solidFill>
-        </p:spPr>
-        <p:style>
-          <a:lnRef idx="2">
-            <a:schemeClr val="accent1">
-              <a:shade val="15000"/>
-            </a:schemeClr>
-          </a:lnRef>
-          <a:fillRef idx="1">
-            <a:schemeClr val="accent1"/>
-          </a:fillRef>
-          <a:effectRef idx="0">
-            <a:schemeClr val="accent1"/>
-          </a:effectRef>
-          <a:fontRef idx="minor">
-            <a:schemeClr val="lt1"/>
-          </a:fontRef>
-        </p:style>
-        <p:txBody>
-          <a:bodyPr rtlCol="0" anchor="ctr"/>
-          <a:lstStyle/>
-          <a:p>
-            <a:pPr algn="ctr"/>
-            <a:r>
-              <a:rPr lang="en-US" dirty="0">
-                <a:solidFill>
-                  <a:schemeClr val="tx1"/>
-                </a:solidFill>
-              </a:rPr>
-              <a:t>New project</a:t>
-            </a:r>
-          </a:p>
-        </p:txBody>
-      </p:sp>
-      <p:cxnSp>
-        <p:nvCxnSpPr>
-          <p:cNvPr id="9" name="Straight Arrow Connector 8">
-            <a:extLst>
-              <a:ext uri="{FF2B5EF4-FFF2-40B4-BE49-F238E27FC236}">
-                <a16:creationId xmlns:a16="http://schemas.microsoft.com/office/drawing/2014/main" id="{C12CC0D2-C0AD-B7C1-A089-41DE613A60AF}"/>
-              </a:ext>
-            </a:extLst>
-          </p:cNvPr>
-          <p:cNvCxnSpPr/>
-          <p:nvPr/>
-        </p:nvCxnSpPr>
-        <p:spPr>
-          <a:xfrm flipV="1">
-            <a:off x="3503815" y="407324"/>
-            <a:ext cx="5419898" cy="1608512"/>
-          </a:xfrm>
-          <a:prstGeom prst="straightConnector1">
-            <a:avLst/>
-          </a:prstGeom>
-          <a:ln w="38100">
-            <a:tailEnd type="triangle"/>
-          </a:ln>
-        </p:spPr>
-        <p:style>
-          <a:lnRef idx="1">
-            <a:schemeClr val="accent2"/>
-          </a:lnRef>
-          <a:fillRef idx="0">
-            <a:schemeClr val="accent2"/>
-          </a:fillRef>
-          <a:effectRef idx="0">
-            <a:schemeClr val="accent2"/>
-          </a:effectRef>
-          <a:fontRef idx="minor">
-            <a:schemeClr val="tx1"/>
-          </a:fontRef>
-        </p:style>
-      </p:cxnSp>
-      <p:cxnSp>
-        <p:nvCxnSpPr>
-          <p:cNvPr id="10" name="Straight Arrow Connector 9">
-            <a:extLst>
-              <a:ext uri="{FF2B5EF4-FFF2-40B4-BE49-F238E27FC236}">
-                <a16:creationId xmlns:a16="http://schemas.microsoft.com/office/drawing/2014/main" id="{92118614-E1A5-B723-ACFA-388A88455815}"/>
-              </a:ext>
-            </a:extLst>
-          </p:cNvPr>
-          <p:cNvCxnSpPr>
-            <a:cxnSpLocks/>
-          </p:cNvCxnSpPr>
-          <p:nvPr/>
-        </p:nvCxnSpPr>
-        <p:spPr>
-          <a:xfrm flipV="1">
-            <a:off x="4810298" y="1371600"/>
-            <a:ext cx="3033222" cy="1723434"/>
-          </a:xfrm>
-          <a:prstGeom prst="straightConnector1">
-            <a:avLst/>
-          </a:prstGeom>
-          <a:ln w="38100">
-            <a:tailEnd type="triangle"/>
-          </a:ln>
-        </p:spPr>
-        <p:style>
-          <a:lnRef idx="1">
-            <a:schemeClr val="accent2"/>
-          </a:lnRef>
-          <a:fillRef idx="0">
-            <a:schemeClr val="accent2"/>
-          </a:fillRef>
-          <a:effectRef idx="0">
-            <a:schemeClr val="accent2"/>
-          </a:effectRef>
-          <a:fontRef idx="minor">
-            <a:schemeClr val="tx1"/>
-          </a:fontRef>
-        </p:style>
-      </p:cxnSp>
-    </p:spTree>
-    <p:extLst>
-      <p:ext uri="{BB962C8B-B14F-4D97-AF65-F5344CB8AC3E}">
-        <p14:creationId xmlns:p14="http://schemas.microsoft.com/office/powerpoint/2010/main" val="3209347830"/>
-      </p:ext>
-    </p:extLst>
-  </p:cSld>
-  <p:clrMapOvr>
-    <a:masterClrMapping/>
-  </p:clrMapOvr>
-</p:sld>
-</file>
-
-<file path=ppt/slides/slide13.xml><?xml version="1.0" encoding="utf-8"?>
-<p:sld xmlns:a="http://schemas.openxmlformats.org/drawingml/2006/main" xmlns:r="http://schemas.openxmlformats.org/officeDocument/2006/relationships" xmlns:p="http://schemas.openxmlformats.org/presentationml/2006/main">
-  <p:cSld>
-    <p:spTree>
-      <p:nvGrpSpPr>
-        <p:cNvPr id="1" name=""/>
-        <p:cNvGrpSpPr/>
-        <p:nvPr/>
-      </p:nvGrpSpPr>
-      <p:grpSpPr>
-        <a:xfrm>
-          <a:off x="0" y="0"/>
-          <a:ext cx="0" cy="0"/>
-          <a:chOff x="0" y="0"/>
-          <a:chExt cx="0" cy="0"/>
-        </a:xfrm>
-      </p:grpSpPr>
-      <p:sp>
-        <p:nvSpPr>
-          <p:cNvPr id="2" name="Title 1">
-            <a:extLst>
-              <a:ext uri="{FF2B5EF4-FFF2-40B4-BE49-F238E27FC236}">
                 <a16:creationId xmlns:a16="http://schemas.microsoft.com/office/drawing/2014/main" id="{D27F1D3F-E19A-86B4-8570-4E6383C32976}"/>
               </a:ext>
             </a:extLst>
@@ -7932,37 +7276,18 @@
                   </a:schemeClr>
                 </a:solidFill>
               </a:rPr>
-              <a:t>Basic HTML</a:t>
-            </a:r>
-          </a:p>
-        </p:txBody>
-      </p:sp>
-      <p:sp>
-        <p:nvSpPr>
-          <p:cNvPr id="3" name="Content Placeholder 2">
-            <a:extLst>
-              <a:ext uri="{FF2B5EF4-FFF2-40B4-BE49-F238E27FC236}">
-                <a16:creationId xmlns:a16="http://schemas.microsoft.com/office/drawing/2014/main" id="{8554C0A5-CBB2-9A5D-2B3F-8C8C01B34A08}"/>
-              </a:ext>
-            </a:extLst>
-          </p:cNvPr>
-          <p:cNvSpPr>
-            <a:spLocks noGrp="1"/>
-          </p:cNvSpPr>
-          <p:nvPr>
-            <p:ph idx="1"/>
-          </p:nvPr>
-        </p:nvSpPr>
-        <p:spPr/>
-        <p:txBody>
-          <a:bodyPr>
-            <a:normAutofit/>
-          </a:bodyPr>
-          <a:lstStyle/>
-          <a:p>
-            <a:pPr marL="0" indent="0">
-              <a:buNone/>
-            </a:pPr>
+              <a:t>index.html </a:t>
+            </a:r>
+            <a:r>
+              <a:rPr lang="en-US" dirty="0">
+                <a:solidFill>
+                  <a:schemeClr val="accent5">
+                    <a:lumMod val="75000"/>
+                  </a:schemeClr>
+                </a:solidFill>
+              </a:rPr>
+              <a:t>and</a:t>
+            </a:r>
             <a:r>
               <a:rPr lang="en-US" b="1" dirty="0">
                 <a:solidFill>
@@ -7971,393 +7296,7 @@
                   </a:schemeClr>
                 </a:solidFill>
               </a:rPr>
-              <a:t>&lt;html&gt;</a:t>
-            </a:r>
-          </a:p>
-          <a:p>
-            <a:pPr marL="0" indent="0">
-              <a:buNone/>
-            </a:pPr>
-            <a:r>
-              <a:rPr lang="en-US" b="1" dirty="0">
-                <a:solidFill>
-                  <a:schemeClr val="accent5">
-                    <a:lumMod val="75000"/>
-                  </a:schemeClr>
-                </a:solidFill>
-              </a:rPr>
-              <a:t>  &lt;head&gt;</a:t>
-            </a:r>
-          </a:p>
-          <a:p>
-            <a:pPr marL="0" indent="0">
-              <a:buNone/>
-            </a:pPr>
-            <a:r>
-              <a:rPr lang="en-US" b="1" dirty="0">
-                <a:solidFill>
-                  <a:schemeClr val="accent5">
-                    <a:lumMod val="75000"/>
-                  </a:schemeClr>
-                </a:solidFill>
-              </a:rPr>
-              <a:t>    </a:t>
-            </a:r>
-          </a:p>
-          <a:p>
-            <a:pPr marL="0" indent="0">
-              <a:buNone/>
-            </a:pPr>
-            <a:r>
-              <a:rPr lang="en-US" b="1" dirty="0">
-                <a:solidFill>
-                  <a:schemeClr val="accent5">
-                    <a:lumMod val="75000"/>
-                  </a:schemeClr>
-                </a:solidFill>
-              </a:rPr>
-              <a:t>  &lt;/head&gt;</a:t>
-            </a:r>
-          </a:p>
-          <a:p>
-            <a:pPr marL="0" indent="0">
-              <a:buNone/>
-            </a:pPr>
-            <a:r>
-              <a:rPr lang="en-US" b="1" dirty="0">
-                <a:solidFill>
-                  <a:schemeClr val="accent5">
-                    <a:lumMod val="75000"/>
-                  </a:schemeClr>
-                </a:solidFill>
-              </a:rPr>
-              <a:t>  &lt;body&gt;</a:t>
-            </a:r>
-          </a:p>
-          <a:p>
-            <a:pPr marL="0" indent="0">
-              <a:buNone/>
-            </a:pPr>
-            <a:r>
-              <a:rPr lang="en-US" b="1" dirty="0">
-                <a:solidFill>
-                  <a:schemeClr val="accent5">
-                    <a:lumMod val="75000"/>
-                  </a:schemeClr>
-                </a:solidFill>
-              </a:rPr>
-              <a:t>    </a:t>
-            </a:r>
-          </a:p>
-          <a:p>
-            <a:pPr marL="0" indent="0">
-              <a:buNone/>
-            </a:pPr>
-            <a:r>
-              <a:rPr lang="en-US" b="1" dirty="0">
-                <a:solidFill>
-                  <a:schemeClr val="accent5">
-                    <a:lumMod val="75000"/>
-                  </a:schemeClr>
-                </a:solidFill>
-              </a:rPr>
-              <a:t>  &lt;/body&gt;</a:t>
-            </a:r>
-          </a:p>
-          <a:p>
-            <a:pPr marL="0" indent="0">
-              <a:buNone/>
-            </a:pPr>
-            <a:r>
-              <a:rPr lang="en-US" b="1" dirty="0">
-                <a:solidFill>
-                  <a:schemeClr val="accent5">
-                    <a:lumMod val="75000"/>
-                  </a:schemeClr>
-                </a:solidFill>
-              </a:rPr>
-              <a:t>&lt;/html&gt;</a:t>
-            </a:r>
-          </a:p>
-        </p:txBody>
-      </p:sp>
-    </p:spTree>
-    <p:extLst>
-      <p:ext uri="{BB962C8B-B14F-4D97-AF65-F5344CB8AC3E}">
-        <p14:creationId xmlns:p14="http://schemas.microsoft.com/office/powerpoint/2010/main" val="225151386"/>
-      </p:ext>
-    </p:extLst>
-  </p:cSld>
-  <p:clrMapOvr>
-    <a:masterClrMapping/>
-  </p:clrMapOvr>
-</p:sld>
-</file>
-
-<file path=ppt/slides/slide14.xml><?xml version="1.0" encoding="utf-8"?>
-<p:sld xmlns:a="http://schemas.openxmlformats.org/drawingml/2006/main" xmlns:r="http://schemas.openxmlformats.org/officeDocument/2006/relationships" xmlns:p="http://schemas.openxmlformats.org/presentationml/2006/main">
-  <p:cSld>
-    <p:spTree>
-      <p:nvGrpSpPr>
-        <p:cNvPr id="1" name=""/>
-        <p:cNvGrpSpPr/>
-        <p:nvPr/>
-      </p:nvGrpSpPr>
-      <p:grpSpPr>
-        <a:xfrm>
-          <a:off x="0" y="0"/>
-          <a:ext cx="0" cy="0"/>
-          <a:chOff x="0" y="0"/>
-          <a:chExt cx="0" cy="0"/>
-        </a:xfrm>
-      </p:grpSpPr>
-      <p:sp>
-        <p:nvSpPr>
-          <p:cNvPr id="2" name="Title 1">
-            <a:extLst>
-              <a:ext uri="{FF2B5EF4-FFF2-40B4-BE49-F238E27FC236}">
-                <a16:creationId xmlns:a16="http://schemas.microsoft.com/office/drawing/2014/main" id="{D28624AD-D4E7-6615-465C-EE22D930F1E1}"/>
-              </a:ext>
-            </a:extLst>
-          </p:cNvPr>
-          <p:cNvSpPr>
-            <a:spLocks noGrp="1"/>
-          </p:cNvSpPr>
-          <p:nvPr>
-            <p:ph type="title"/>
-          </p:nvPr>
-        </p:nvSpPr>
-        <p:spPr/>
-        <p:txBody>
-          <a:bodyPr/>
-          <a:lstStyle/>
-          <a:p>
-            <a:r>
-              <a:rPr lang="en-US" dirty="0"/>
-              <a:t>Working with Glitch</a:t>
-            </a:r>
-          </a:p>
-        </p:txBody>
-      </p:sp>
-      <p:sp>
-        <p:nvSpPr>
-          <p:cNvPr id="3" name="Content Placeholder 2">
-            <a:extLst>
-              <a:ext uri="{FF2B5EF4-FFF2-40B4-BE49-F238E27FC236}">
-                <a16:creationId xmlns:a16="http://schemas.microsoft.com/office/drawing/2014/main" id="{8ACE9983-BB8F-4742-49DC-E94D2E2AFE54}"/>
-              </a:ext>
-            </a:extLst>
-          </p:cNvPr>
-          <p:cNvSpPr>
-            <a:spLocks noGrp="1"/>
-          </p:cNvSpPr>
-          <p:nvPr>
-            <p:ph idx="1"/>
-          </p:nvPr>
-        </p:nvSpPr>
-        <p:spPr/>
-        <p:txBody>
-          <a:bodyPr>
-            <a:normAutofit fontScale="85000" lnSpcReduction="10000"/>
-          </a:bodyPr>
-          <a:lstStyle/>
-          <a:p>
-            <a:pPr marL="0" indent="0">
-              <a:buNone/>
-            </a:pPr>
-            <a:endParaRPr lang="en-US" dirty="0"/>
-          </a:p>
-          <a:p>
-            <a:pPr marL="0" indent="0">
-              <a:buNone/>
-            </a:pPr>
-            <a:endParaRPr lang="en-US" dirty="0"/>
-          </a:p>
-          <a:p>
-            <a:pPr marL="0" indent="0">
-              <a:buNone/>
-            </a:pPr>
-            <a:r>
-              <a:rPr lang="en-US" dirty="0"/>
-              <a:t>Replace the original </a:t>
-            </a:r>
-            <a:r>
-              <a:rPr lang="en-US" b="1" dirty="0"/>
-              <a:t>index.html </a:t>
-            </a:r>
-            <a:r>
-              <a:rPr lang="en-US" dirty="0"/>
-              <a:t>in Glitch with </a:t>
-            </a:r>
-          </a:p>
-          <a:p>
-            <a:pPr marL="0" indent="0">
-              <a:buNone/>
-            </a:pPr>
-            <a:endParaRPr lang="en-US" dirty="0"/>
-          </a:p>
-          <a:p>
-            <a:pPr marL="514350" indent="-514350">
-              <a:buAutoNum type="arabicPeriod"/>
-            </a:pPr>
-            <a:r>
-              <a:rPr lang="en-US" dirty="0"/>
-              <a:t>The contents of </a:t>
-            </a:r>
-            <a:r>
-              <a:rPr lang="en-US" b="1" dirty="0"/>
-              <a:t>not-index.html </a:t>
-            </a:r>
-            <a:r>
-              <a:rPr lang="en-US" dirty="0"/>
-              <a:t>from p01</a:t>
-            </a:r>
-          </a:p>
-          <a:p>
-            <a:pPr marL="514350" indent="-514350">
-              <a:buAutoNum type="arabicPeriod"/>
-            </a:pPr>
-            <a:r>
-              <a:rPr lang="en-US" dirty="0"/>
-              <a:t>Find the same project on your phone name as Glitch shows on your laptop</a:t>
-            </a:r>
-          </a:p>
-          <a:p>
-            <a:pPr marL="514350" indent="-514350">
-              <a:buAutoNum type="arabicPeriod"/>
-            </a:pPr>
-            <a:r>
-              <a:rPr lang="en-US" dirty="0"/>
-              <a:t>Put your Virtual Reality Glasses on you phone and look through them</a:t>
-            </a:r>
-          </a:p>
-          <a:p>
-            <a:pPr marL="514350" indent="-514350">
-              <a:buAutoNum type="arabicPeriod"/>
-            </a:pPr>
-            <a:r>
-              <a:rPr lang="en-US" dirty="0"/>
-              <a:t>You should see </a:t>
-            </a:r>
-            <a:r>
-              <a:rPr lang="en-US" sz="2800" dirty="0">
-                <a:solidFill>
-                  <a:schemeClr val="accent5">
-                    <a:lumMod val="75000"/>
-                  </a:schemeClr>
-                </a:solidFill>
-              </a:rPr>
-              <a:t>HELLO A-Frame!!! </a:t>
-            </a:r>
-            <a:r>
-              <a:rPr lang="en-US" sz="2800" dirty="0"/>
-              <a:t>on a dark blue background</a:t>
-            </a:r>
-          </a:p>
-          <a:p>
-            <a:pPr marL="457200" lvl="1" indent="0">
-              <a:buNone/>
-            </a:pPr>
-            <a:endParaRPr lang="en-US" dirty="0"/>
-          </a:p>
-          <a:p>
-            <a:pPr marL="457200" lvl="1" indent="0">
-              <a:buNone/>
-            </a:pPr>
-            <a:r>
-              <a:rPr lang="en-US" dirty="0"/>
-              <a:t>All that work and we end up with a blue background!</a:t>
-            </a:r>
-          </a:p>
-          <a:p>
-            <a:pPr marL="457200" lvl="1" indent="0">
-              <a:buNone/>
-            </a:pPr>
-            <a:r>
-              <a:rPr lang="en-US" dirty="0"/>
-              <a:t>How can we improve the background?</a:t>
-            </a:r>
-          </a:p>
-          <a:p>
-            <a:pPr marL="514350" indent="-514350">
-              <a:buAutoNum type="arabicPeriod"/>
-            </a:pPr>
-            <a:endParaRPr lang="en-US" dirty="0"/>
-          </a:p>
-          <a:p>
-            <a:pPr marL="0" indent="0">
-              <a:buNone/>
-            </a:pPr>
-            <a:endParaRPr lang="en-US" dirty="0"/>
-          </a:p>
-          <a:p>
-            <a:pPr marL="0" indent="0">
-              <a:buNone/>
-            </a:pPr>
-            <a:endParaRPr lang="en-US" dirty="0"/>
-          </a:p>
-        </p:txBody>
-      </p:sp>
-    </p:spTree>
-    <p:extLst>
-      <p:ext uri="{BB962C8B-B14F-4D97-AF65-F5344CB8AC3E}">
-        <p14:creationId xmlns:p14="http://schemas.microsoft.com/office/powerpoint/2010/main" val="721133168"/>
-      </p:ext>
-    </p:extLst>
-  </p:cSld>
-  <p:clrMapOvr>
-    <a:masterClrMapping/>
-  </p:clrMapOvr>
-</p:sld>
-</file>
-
-<file path=ppt/slides/slide15.xml><?xml version="1.0" encoding="utf-8"?>
-<p:sld xmlns:a="http://schemas.openxmlformats.org/drawingml/2006/main" xmlns:r="http://schemas.openxmlformats.org/officeDocument/2006/relationships" xmlns:p="http://schemas.openxmlformats.org/presentationml/2006/main">
-  <p:cSld>
-    <p:spTree>
-      <p:nvGrpSpPr>
-        <p:cNvPr id="1" name=""/>
-        <p:cNvGrpSpPr/>
-        <p:nvPr/>
-      </p:nvGrpSpPr>
-      <p:grpSpPr>
-        <a:xfrm>
-          <a:off x="0" y="0"/>
-          <a:ext cx="0" cy="0"/>
-          <a:chOff x="0" y="0"/>
-          <a:chExt cx="0" cy="0"/>
-        </a:xfrm>
-      </p:grpSpPr>
-      <p:sp>
-        <p:nvSpPr>
-          <p:cNvPr id="2" name="Title 1">
-            <a:extLst>
-              <a:ext uri="{FF2B5EF4-FFF2-40B4-BE49-F238E27FC236}">
-                <a16:creationId xmlns:a16="http://schemas.microsoft.com/office/drawing/2014/main" id="{D27F1D3F-E19A-86B4-8570-4E6383C32976}"/>
-              </a:ext>
-            </a:extLst>
-          </p:cNvPr>
-          <p:cNvSpPr>
-            <a:spLocks noGrp="1"/>
-          </p:cNvSpPr>
-          <p:nvPr>
-            <p:ph type="title"/>
-          </p:nvPr>
-        </p:nvSpPr>
-        <p:spPr/>
-        <p:txBody>
-          <a:bodyPr/>
-          <a:lstStyle/>
-          <a:p>
-            <a:r>
-              <a:rPr lang="en-US" b="1" dirty="0">
-                <a:solidFill>
-                  <a:schemeClr val="accent5">
-                    <a:lumMod val="75000"/>
-                  </a:schemeClr>
-                </a:solidFill>
-              </a:rPr>
-              <a:t>Replace index.html with not-index.html</a:t>
+              <a:t> not-index.html</a:t>
             </a:r>
           </a:p>
         </p:txBody>
@@ -9220,7 +8159,7 @@
 </p:sld>
 </file>
 
-<file path=ppt/slides/slide16.xml><?xml version="1.0" encoding="utf-8"?>
+<file path=ppt/slides/slide11.xml><?xml version="1.0" encoding="utf-8"?>
 <p:sld xmlns:a="http://schemas.openxmlformats.org/drawingml/2006/main" xmlns:r="http://schemas.openxmlformats.org/officeDocument/2006/relationships" xmlns:p="http://schemas.openxmlformats.org/presentationml/2006/main">
   <p:cSld>
     <p:spTree>
@@ -9287,7 +8226,12 @@
             <p:ph idx="1"/>
           </p:nvPr>
         </p:nvSpPr>
-        <p:spPr/>
+        <p:spPr>
+          <a:xfrm>
+            <a:off x="1067825" y="1690688"/>
+            <a:ext cx="10515600" cy="4351338"/>
+          </a:xfrm>
+        </p:spPr>
         <p:txBody>
           <a:bodyPr>
             <a:normAutofit/>
@@ -9303,57 +8247,33 @@
             <a:pPr marL="0" indent="0">
               <a:buNone/>
             </a:pPr>
+            <a:endParaRPr lang="en-US" dirty="0"/>
+          </a:p>
+          <a:p>
+            <a:pPr marL="0" indent="0">
+              <a:buNone/>
+            </a:pPr>
             <a:r>
               <a:rPr lang="en-US" dirty="0"/>
-              <a:t>Login to </a:t>
-            </a:r>
-            <a:r>
-              <a:rPr lang="en-US" b="1" dirty="0"/>
-              <a:t>glitch</a:t>
+              <a:t>On your phone go to your </a:t>
+            </a:r>
+            <a:r>
+              <a:rPr lang="en-US" dirty="0" err="1"/>
+              <a:t>github</a:t>
             </a:r>
             <a:r>
               <a:rPr lang="en-US" dirty="0"/>
-              <a:t> on your phone to synchronize it with your laptop</a:t>
+              <a:t> pages</a:t>
             </a:r>
           </a:p>
           <a:p>
             <a:pPr marL="0" indent="0">
               <a:buNone/>
             </a:pPr>
-            <a:endParaRPr lang="en-US" dirty="0"/>
-          </a:p>
-          <a:p>
-            <a:pPr marL="0" indent="0">
-              <a:buNone/>
-            </a:pPr>
             <a:r>
               <a:rPr lang="en-US" dirty="0"/>
-              <a:t>On your phone go to your Dashboard</a:t>
-            </a:r>
-          </a:p>
-          <a:p>
-            <a:pPr marL="0" indent="0">
-              <a:buNone/>
-            </a:pPr>
-            <a:r>
-              <a:rPr lang="en-US" dirty="0"/>
-              <a:t>	Go to Projects</a:t>
-            </a:r>
-          </a:p>
-          <a:p>
-            <a:pPr marL="0" indent="0">
-              <a:buNone/>
-            </a:pPr>
-            <a:r>
-              <a:rPr lang="en-US" dirty="0"/>
-              <a:t>	Select the same project you are working on in your laptop</a:t>
-            </a:r>
-          </a:p>
-          <a:p>
-            <a:pPr marL="0" indent="0">
-              <a:buNone/>
-            </a:pPr>
-            <a:endParaRPr lang="en-US" dirty="0"/>
+              <a:t>	</a:t>
+            </a:r>
           </a:p>
           <a:p>
             <a:pPr marL="0" indent="0">
@@ -9405,7 +8325,7 @@
 </p:sld>
 </file>
 
-<file path=ppt/slides/slide17.xml><?xml version="1.0" encoding="utf-8"?>
+<file path=ppt/slides/slide12.xml><?xml version="1.0" encoding="utf-8"?>
 <p:sld xmlns:a="http://schemas.openxmlformats.org/drawingml/2006/main" xmlns:r="http://schemas.openxmlformats.org/officeDocument/2006/relationships" xmlns:p="http://schemas.openxmlformats.org/presentationml/2006/main">
   <p:cSld>
     <p:spTree>
@@ -10171,7 +9091,7 @@
 </p:sld>
 </file>
 
-<file path=ppt/slides/slide18.xml><?xml version="1.0" encoding="utf-8"?>
+<file path=ppt/slides/slide13.xml><?xml version="1.0" encoding="utf-8"?>
 <p:sld xmlns:a="http://schemas.openxmlformats.org/drawingml/2006/main" xmlns:r="http://schemas.openxmlformats.org/officeDocument/2006/relationships" xmlns:p="http://schemas.openxmlformats.org/presentationml/2006/main">
   <p:cSld>
     <p:spTree>
@@ -10486,928 +9406,7 @@
 </p:sld>
 </file>
 
-<file path=ppt/slides/slide19.xml><?xml version="1.0" encoding="utf-8"?>
-<p:sld xmlns:a="http://schemas.openxmlformats.org/drawingml/2006/main" xmlns:r="http://schemas.openxmlformats.org/officeDocument/2006/relationships" xmlns:p="http://schemas.openxmlformats.org/presentationml/2006/main">
-  <p:cSld>
-    <p:spTree>
-      <p:nvGrpSpPr>
-        <p:cNvPr id="1" name=""/>
-        <p:cNvGrpSpPr/>
-        <p:nvPr/>
-      </p:nvGrpSpPr>
-      <p:grpSpPr>
-        <a:xfrm>
-          <a:off x="0" y="0"/>
-          <a:ext cx="0" cy="0"/>
-          <a:chOff x="0" y="0"/>
-          <a:chExt cx="0" cy="0"/>
-        </a:xfrm>
-      </p:grpSpPr>
-      <p:sp>
-        <p:nvSpPr>
-          <p:cNvPr id="2" name="Title 1">
-            <a:extLst>
-              <a:ext uri="{FF2B5EF4-FFF2-40B4-BE49-F238E27FC236}">
-                <a16:creationId xmlns:a16="http://schemas.microsoft.com/office/drawing/2014/main" id="{8272B7CB-603B-97DE-6E01-D162013AE257}"/>
-              </a:ext>
-            </a:extLst>
-          </p:cNvPr>
-          <p:cNvSpPr>
-            <a:spLocks noGrp="1"/>
-          </p:cNvSpPr>
-          <p:nvPr>
-            <p:ph type="title"/>
-          </p:nvPr>
-        </p:nvSpPr>
-        <p:spPr/>
-        <p:txBody>
-          <a:bodyPr/>
-          <a:lstStyle/>
-          <a:p>
-            <a:r>
-              <a:rPr lang="en-US" b="1" dirty="0">
-                <a:solidFill>
-                  <a:schemeClr val="accent5">
-                    <a:lumMod val="75000"/>
-                  </a:schemeClr>
-                </a:solidFill>
-              </a:rPr>
-              <a:t>How to upload a picture into glitch</a:t>
-            </a:r>
-            <a:endParaRPr lang="en-US" dirty="0"/>
-          </a:p>
-        </p:txBody>
-      </p:sp>
-      <p:sp>
-        <p:nvSpPr>
-          <p:cNvPr id="3" name="Content Placeholder 2">
-            <a:extLst>
-              <a:ext uri="{FF2B5EF4-FFF2-40B4-BE49-F238E27FC236}">
-                <a16:creationId xmlns:a16="http://schemas.microsoft.com/office/drawing/2014/main" id="{D8E00910-5D6B-099F-654B-F32FD2ABD6A6}"/>
-              </a:ext>
-            </a:extLst>
-          </p:cNvPr>
-          <p:cNvSpPr>
-            <a:spLocks noGrp="1"/>
-          </p:cNvSpPr>
-          <p:nvPr>
-            <p:ph idx="1"/>
-          </p:nvPr>
-        </p:nvSpPr>
-        <p:spPr>
-          <a:xfrm>
-            <a:off x="838200" y="1825625"/>
-            <a:ext cx="10515600" cy="4667250"/>
-          </a:xfrm>
-        </p:spPr>
-        <p:txBody>
-          <a:bodyPr>
-            <a:normAutofit lnSpcReduction="10000"/>
-          </a:bodyPr>
-          <a:lstStyle/>
-          <a:p>
-            <a:pPr marL="0" indent="0">
-              <a:lnSpc>
-                <a:spcPct val="120000"/>
-              </a:lnSpc>
-              <a:spcBef>
-                <a:spcPts val="0"/>
-              </a:spcBef>
-              <a:buNone/>
-            </a:pPr>
-            <a:r>
-              <a:rPr lang="en-US" dirty="0"/>
-              <a:t>To use a photo (</a:t>
-            </a:r>
-            <a:r>
-              <a:rPr lang="en-US" dirty="0">
-                <a:solidFill>
-                  <a:srgbClr val="FF0000"/>
-                </a:solidFill>
-              </a:rPr>
-              <a:t>Moving_Forest_1050_700.webp </a:t>
-            </a:r>
-            <a:r>
-              <a:rPr lang="en-US" dirty="0"/>
-              <a:t>in p01/IMAGES) as a background upload it into glitch this way</a:t>
-            </a:r>
-          </a:p>
-          <a:p>
-            <a:pPr marL="0" indent="0">
-              <a:lnSpc>
-                <a:spcPct val="120000"/>
-              </a:lnSpc>
-              <a:spcBef>
-                <a:spcPts val="0"/>
-              </a:spcBef>
-              <a:buNone/>
-            </a:pPr>
-            <a:endParaRPr lang="en-US" dirty="0"/>
-          </a:p>
-          <a:p>
-            <a:pPr marL="0" indent="0">
-              <a:lnSpc>
-                <a:spcPct val="120000"/>
-              </a:lnSpc>
-              <a:spcBef>
-                <a:spcPts val="0"/>
-              </a:spcBef>
-              <a:buNone/>
-            </a:pPr>
-            <a:r>
-              <a:rPr lang="en-US" dirty="0"/>
-              <a:t>Make sure to copy the new URL something like</a:t>
-            </a:r>
-          </a:p>
-          <a:p>
-            <a:pPr marL="0" indent="0">
-              <a:lnSpc>
-                <a:spcPct val="120000"/>
-              </a:lnSpc>
-              <a:spcBef>
-                <a:spcPts val="0"/>
-              </a:spcBef>
-              <a:buNone/>
-            </a:pPr>
-            <a:endParaRPr lang="en-US" dirty="0"/>
-          </a:p>
-          <a:p>
-            <a:pPr marL="0" indent="0">
-              <a:lnSpc>
-                <a:spcPct val="120000"/>
-              </a:lnSpc>
-              <a:spcBef>
-                <a:spcPts val="0"/>
-              </a:spcBef>
-              <a:buNone/>
-            </a:pPr>
-            <a:r>
-              <a:rPr lang="en-US" dirty="0">
-                <a:solidFill>
-                  <a:srgbClr val="FF0000"/>
-                </a:solidFill>
-              </a:rPr>
-              <a:t>&lt;a-sky</a:t>
-            </a:r>
-          </a:p>
-          <a:p>
-            <a:pPr marL="0" indent="0">
-              <a:lnSpc>
-                <a:spcPct val="120000"/>
-              </a:lnSpc>
-              <a:spcBef>
-                <a:spcPts val="0"/>
-              </a:spcBef>
-              <a:buNone/>
-            </a:pPr>
-            <a:r>
-              <a:rPr lang="en-US" dirty="0">
-                <a:solidFill>
-                  <a:srgbClr val="FF0000"/>
-                </a:solidFill>
-              </a:rPr>
-              <a:t>        </a:t>
-            </a:r>
-            <a:r>
-              <a:rPr lang="en-US" dirty="0" err="1">
-                <a:solidFill>
-                  <a:srgbClr val="FF0000"/>
-                </a:solidFill>
-              </a:rPr>
-              <a:t>src</a:t>
-            </a:r>
-            <a:r>
-              <a:rPr lang="en-US" dirty="0">
-                <a:solidFill>
-                  <a:srgbClr val="FF0000"/>
-                </a:solidFill>
-              </a:rPr>
-              <a:t>="https://cdn.glitch.global/4cb2dafe-67a2-4c7f-b424-b5ef32487f34/Moving_Forest_1050_700.webp?v=1696984169228"&gt;</a:t>
-            </a:r>
-          </a:p>
-          <a:p>
-            <a:pPr marL="0" indent="0">
-              <a:lnSpc>
-                <a:spcPct val="120000"/>
-              </a:lnSpc>
-              <a:spcBef>
-                <a:spcPts val="0"/>
-              </a:spcBef>
-              <a:buNone/>
-            </a:pPr>
-            <a:r>
-              <a:rPr lang="en-US" dirty="0">
-                <a:solidFill>
-                  <a:srgbClr val="FF0000"/>
-                </a:solidFill>
-              </a:rPr>
-              <a:t> &lt;/a-sky&gt;</a:t>
-            </a:r>
-          </a:p>
-          <a:p>
-            <a:pPr marL="0" indent="0">
-              <a:lnSpc>
-                <a:spcPct val="120000"/>
-              </a:lnSpc>
-              <a:spcBef>
-                <a:spcPts val="0"/>
-              </a:spcBef>
-              <a:buNone/>
-            </a:pPr>
-            <a:endParaRPr lang="en-US" dirty="0"/>
-          </a:p>
-          <a:p>
-            <a:pPr marL="0" indent="0">
-              <a:lnSpc>
-                <a:spcPct val="120000"/>
-              </a:lnSpc>
-              <a:spcBef>
-                <a:spcPts val="0"/>
-              </a:spcBef>
-              <a:buNone/>
-            </a:pPr>
-            <a:endParaRPr lang="en-US" dirty="0"/>
-          </a:p>
-          <a:p>
-            <a:pPr marL="0" indent="0">
-              <a:lnSpc>
-                <a:spcPct val="120000"/>
-              </a:lnSpc>
-              <a:spcBef>
-                <a:spcPts val="0"/>
-              </a:spcBef>
-              <a:buNone/>
-            </a:pPr>
-            <a:endParaRPr lang="en-US" dirty="0">
-              <a:solidFill>
-                <a:srgbClr val="FF0000"/>
-              </a:solidFill>
-            </a:endParaRPr>
-          </a:p>
-          <a:p>
-            <a:pPr marL="0" indent="0">
-              <a:lnSpc>
-                <a:spcPct val="120000"/>
-              </a:lnSpc>
-              <a:spcBef>
-                <a:spcPts val="0"/>
-              </a:spcBef>
-              <a:buNone/>
-            </a:pPr>
-            <a:endParaRPr lang="en-US" dirty="0">
-              <a:solidFill>
-                <a:srgbClr val="FF0000"/>
-              </a:solidFill>
-            </a:endParaRPr>
-          </a:p>
-        </p:txBody>
-      </p:sp>
-    </p:spTree>
-    <p:extLst>
-      <p:ext uri="{BB962C8B-B14F-4D97-AF65-F5344CB8AC3E}">
-        <p14:creationId xmlns:p14="http://schemas.microsoft.com/office/powerpoint/2010/main" val="3981969952"/>
-      </p:ext>
-    </p:extLst>
-  </p:cSld>
-  <p:clrMapOvr>
-    <a:masterClrMapping/>
-  </p:clrMapOvr>
-</p:sld>
-</file>
-
-<file path=ppt/slides/slide2.xml><?xml version="1.0" encoding="utf-8"?>
-<p:sld xmlns:a="http://schemas.openxmlformats.org/drawingml/2006/main" xmlns:r="http://schemas.openxmlformats.org/officeDocument/2006/relationships" xmlns:p="http://schemas.openxmlformats.org/presentationml/2006/main">
-  <p:cSld>
-    <p:spTree>
-      <p:nvGrpSpPr>
-        <p:cNvPr id="1" name=""/>
-        <p:cNvGrpSpPr/>
-        <p:nvPr/>
-      </p:nvGrpSpPr>
-      <p:grpSpPr>
-        <a:xfrm>
-          <a:off x="0" y="0"/>
-          <a:ext cx="0" cy="0"/>
-          <a:chOff x="0" y="0"/>
-          <a:chExt cx="0" cy="0"/>
-        </a:xfrm>
-      </p:grpSpPr>
-      <p:sp>
-        <p:nvSpPr>
-          <p:cNvPr id="2" name="Title 1">
-            <a:extLst>
-              <a:ext uri="{FF2B5EF4-FFF2-40B4-BE49-F238E27FC236}">
-                <a16:creationId xmlns:a16="http://schemas.microsoft.com/office/drawing/2014/main" id="{CCEF71E3-E69E-435D-7B1B-207FBC952569}"/>
-              </a:ext>
-            </a:extLst>
-          </p:cNvPr>
-          <p:cNvSpPr>
-            <a:spLocks noGrp="1"/>
-          </p:cNvSpPr>
-          <p:nvPr>
-            <p:ph type="title"/>
-          </p:nvPr>
-        </p:nvSpPr>
-        <p:spPr/>
-        <p:txBody>
-          <a:bodyPr/>
-          <a:lstStyle/>
-          <a:p>
-            <a:r>
-              <a:rPr lang="en-US" dirty="0"/>
-              <a:t>Full select demo – how you can do …</a:t>
-            </a:r>
-          </a:p>
-        </p:txBody>
-      </p:sp>
-      <p:sp>
-        <p:nvSpPr>
-          <p:cNvPr id="3" name="Rectangle 2">
-            <a:extLst>
-              <a:ext uri="{FF2B5EF4-FFF2-40B4-BE49-F238E27FC236}">
-                <a16:creationId xmlns:a16="http://schemas.microsoft.com/office/drawing/2014/main" id="{B18A33C3-76E0-66B5-AC60-6763DB8A1017}"/>
-              </a:ext>
-            </a:extLst>
-          </p:cNvPr>
-          <p:cNvSpPr/>
-          <p:nvPr/>
-        </p:nvSpPr>
-        <p:spPr>
-          <a:xfrm>
-            <a:off x="3647550" y="4618445"/>
-            <a:ext cx="5712489" cy="1325563"/>
-          </a:xfrm>
-          <a:prstGeom prst="rect">
-            <a:avLst/>
-          </a:prstGeom>
-        </p:spPr>
-        <p:style>
-          <a:lnRef idx="2">
-            <a:schemeClr val="accent1">
-              <a:shade val="15000"/>
-            </a:schemeClr>
-          </a:lnRef>
-          <a:fillRef idx="1">
-            <a:schemeClr val="accent1"/>
-          </a:fillRef>
-          <a:effectRef idx="0">
-            <a:schemeClr val="accent1"/>
-          </a:effectRef>
-          <a:fontRef idx="minor">
-            <a:schemeClr val="lt1"/>
-          </a:fontRef>
-        </p:style>
-        <p:txBody>
-          <a:bodyPr rtlCol="0" anchor="ctr"/>
-          <a:lstStyle/>
-          <a:p>
-            <a:pPr algn="ctr"/>
-            <a:endParaRPr lang="en-US" dirty="0"/>
-          </a:p>
-          <a:p>
-            <a:pPr algn="ctr"/>
-            <a:r>
-              <a:rPr lang="en-US" dirty="0">
-                <a:solidFill>
-                  <a:schemeClr val="bg1"/>
-                </a:solidFill>
-                <a:hlinkClick r:id="rId2">
-                  <a:extLst>
-                    <a:ext uri="{A12FA001-AC4F-418D-AE19-62706E023703}">
-                      <ahyp:hlinkClr xmlns:ahyp="http://schemas.microsoft.com/office/drawing/2018/hyperlinkcolor" val="tx"/>
-                    </a:ext>
-                  </a:extLst>
-                </a:hlinkClick>
-              </a:rPr>
-              <a:t>Basic-Mars-Landing</a:t>
-            </a:r>
-            <a:endParaRPr lang="en-US" dirty="0">
-              <a:solidFill>
-                <a:schemeClr val="bg1"/>
-              </a:solidFill>
-            </a:endParaRPr>
-          </a:p>
-          <a:p>
-            <a:pPr algn="ctr"/>
-            <a:endParaRPr lang="en-US" dirty="0"/>
-          </a:p>
-        </p:txBody>
-      </p:sp>
-      <p:pic>
-        <p:nvPicPr>
-          <p:cNvPr id="5" name="Picture 4">
-            <a:extLst>
-              <a:ext uri="{FF2B5EF4-FFF2-40B4-BE49-F238E27FC236}">
-                <a16:creationId xmlns:a16="http://schemas.microsoft.com/office/drawing/2014/main" id="{CC2EEE88-7DBD-3B16-1AA0-B23E0B83B28A}"/>
-              </a:ext>
-            </a:extLst>
-          </p:cNvPr>
-          <p:cNvPicPr>
-            <a:picLocks noChangeAspect="1"/>
-          </p:cNvPicPr>
-          <p:nvPr/>
-        </p:nvPicPr>
-        <p:blipFill>
-          <a:blip r:embed="rId3"/>
-          <a:stretch>
-            <a:fillRect/>
-          </a:stretch>
-        </p:blipFill>
-        <p:spPr>
-          <a:xfrm>
-            <a:off x="5138330" y="1887134"/>
-            <a:ext cx="2473296" cy="2473296"/>
-          </a:xfrm>
-          <a:prstGeom prst="rect">
-            <a:avLst/>
-          </a:prstGeom>
-        </p:spPr>
-      </p:pic>
-    </p:spTree>
-    <p:extLst>
-      <p:ext uri="{BB962C8B-B14F-4D97-AF65-F5344CB8AC3E}">
-        <p14:creationId xmlns:p14="http://schemas.microsoft.com/office/powerpoint/2010/main" val="3177984982"/>
-      </p:ext>
-    </p:extLst>
-  </p:cSld>
-  <p:clrMapOvr>
-    <a:masterClrMapping/>
-  </p:clrMapOvr>
-</p:sld>
-</file>
-
-<file path=ppt/slides/slide20.xml><?xml version="1.0" encoding="utf-8"?>
-<p:sld xmlns:a="http://schemas.openxmlformats.org/drawingml/2006/main" xmlns:r="http://schemas.openxmlformats.org/officeDocument/2006/relationships" xmlns:p="http://schemas.openxmlformats.org/presentationml/2006/main">
-  <p:cSld>
-    <p:spTree>
-      <p:nvGrpSpPr>
-        <p:cNvPr id="1" name=""/>
-        <p:cNvGrpSpPr/>
-        <p:nvPr/>
-      </p:nvGrpSpPr>
-      <p:grpSpPr>
-        <a:xfrm>
-          <a:off x="0" y="0"/>
-          <a:ext cx="0" cy="0"/>
-          <a:chOff x="0" y="0"/>
-          <a:chExt cx="0" cy="0"/>
-        </a:xfrm>
-      </p:grpSpPr>
-      <p:sp>
-        <p:nvSpPr>
-          <p:cNvPr id="2" name="Title 1">
-            <a:extLst>
-              <a:ext uri="{FF2B5EF4-FFF2-40B4-BE49-F238E27FC236}">
-                <a16:creationId xmlns:a16="http://schemas.microsoft.com/office/drawing/2014/main" id="{8272B7CB-603B-97DE-6E01-D162013AE257}"/>
-              </a:ext>
-            </a:extLst>
-          </p:cNvPr>
-          <p:cNvSpPr>
-            <a:spLocks noGrp="1"/>
-          </p:cNvSpPr>
-          <p:nvPr>
-            <p:ph type="title"/>
-          </p:nvPr>
-        </p:nvSpPr>
-        <p:spPr/>
-        <p:txBody>
-          <a:bodyPr/>
-          <a:lstStyle/>
-          <a:p>
-            <a:r>
-              <a:rPr lang="en-US" b="1" dirty="0">
-                <a:solidFill>
-                  <a:schemeClr val="accent5">
-                    <a:lumMod val="75000"/>
-                  </a:schemeClr>
-                </a:solidFill>
-              </a:rPr>
-              <a:t>Adding a picture to simple-sky.html</a:t>
-            </a:r>
-            <a:endParaRPr lang="en-US" dirty="0"/>
-          </a:p>
-        </p:txBody>
-      </p:sp>
-      <p:sp>
-        <p:nvSpPr>
-          <p:cNvPr id="3" name="Content Placeholder 2">
-            <a:extLst>
-              <a:ext uri="{FF2B5EF4-FFF2-40B4-BE49-F238E27FC236}">
-                <a16:creationId xmlns:a16="http://schemas.microsoft.com/office/drawing/2014/main" id="{D8E00910-5D6B-099F-654B-F32FD2ABD6A6}"/>
-              </a:ext>
-            </a:extLst>
-          </p:cNvPr>
-          <p:cNvSpPr>
-            <a:spLocks noGrp="1"/>
-          </p:cNvSpPr>
-          <p:nvPr>
-            <p:ph idx="1"/>
-          </p:nvPr>
-        </p:nvSpPr>
-        <p:spPr>
-          <a:xfrm>
-            <a:off x="838200" y="1825625"/>
-            <a:ext cx="10515600" cy="4667250"/>
-          </a:xfrm>
-        </p:spPr>
-        <p:txBody>
-          <a:bodyPr>
-            <a:normAutofit fontScale="55000" lnSpcReduction="20000"/>
-          </a:bodyPr>
-          <a:lstStyle/>
-          <a:p>
-            <a:pPr marL="0" indent="0">
-              <a:lnSpc>
-                <a:spcPct val="120000"/>
-              </a:lnSpc>
-              <a:spcBef>
-                <a:spcPts val="0"/>
-              </a:spcBef>
-              <a:buNone/>
-            </a:pPr>
-            <a:r>
-              <a:rPr lang="en-US" dirty="0"/>
-              <a:t>&lt;html&gt;</a:t>
-            </a:r>
-          </a:p>
-          <a:p>
-            <a:pPr marL="0" indent="0">
-              <a:lnSpc>
-                <a:spcPct val="120000"/>
-              </a:lnSpc>
-              <a:spcBef>
-                <a:spcPts val="0"/>
-              </a:spcBef>
-              <a:buNone/>
-            </a:pPr>
-            <a:r>
-              <a:rPr lang="en-US" dirty="0"/>
-              <a:t>  &lt;head&gt;</a:t>
-            </a:r>
-          </a:p>
-          <a:p>
-            <a:pPr marL="0" indent="0">
-              <a:lnSpc>
-                <a:spcPct val="120000"/>
-              </a:lnSpc>
-              <a:spcBef>
-                <a:spcPts val="0"/>
-              </a:spcBef>
-              <a:buNone/>
-            </a:pPr>
-            <a:r>
-              <a:rPr lang="en-US" dirty="0"/>
-              <a:t>    &lt;script </a:t>
-            </a:r>
-            <a:r>
-              <a:rPr lang="en-US" dirty="0" err="1"/>
-              <a:t>src</a:t>
-            </a:r>
-            <a:r>
-              <a:rPr lang="en-US" dirty="0"/>
-              <a:t>="https://aframe.io/releases/1.7.1/aframe.min.js"&gt;&lt;/script&gt;</a:t>
-            </a:r>
-          </a:p>
-          <a:p>
-            <a:pPr marL="0" indent="0">
-              <a:lnSpc>
-                <a:spcPct val="120000"/>
-              </a:lnSpc>
-              <a:spcBef>
-                <a:spcPts val="0"/>
-              </a:spcBef>
-              <a:buNone/>
-            </a:pPr>
-            <a:r>
-              <a:rPr lang="en-US" dirty="0"/>
-              <a:t>  &lt;/head&gt;</a:t>
-            </a:r>
-          </a:p>
-          <a:p>
-            <a:pPr marL="0" indent="0">
-              <a:lnSpc>
-                <a:spcPct val="120000"/>
-              </a:lnSpc>
-              <a:spcBef>
-                <a:spcPts val="0"/>
-              </a:spcBef>
-              <a:buNone/>
-            </a:pPr>
-            <a:r>
-              <a:rPr lang="en-US" dirty="0"/>
-              <a:t>  &lt;body&gt;</a:t>
-            </a:r>
-          </a:p>
-          <a:p>
-            <a:pPr marL="0" indent="0">
-              <a:lnSpc>
-                <a:spcPct val="120000"/>
-              </a:lnSpc>
-              <a:spcBef>
-                <a:spcPts val="0"/>
-              </a:spcBef>
-              <a:buNone/>
-            </a:pPr>
-            <a:r>
-              <a:rPr lang="en-US" dirty="0"/>
-              <a:t>    </a:t>
-            </a:r>
-            <a:r>
-              <a:rPr lang="en-US" dirty="0">
-                <a:solidFill>
-                  <a:srgbClr val="FF0000"/>
-                </a:solidFill>
-              </a:rPr>
-              <a:t>&lt;a-scene&gt;</a:t>
-            </a:r>
-          </a:p>
-          <a:p>
-            <a:pPr marL="0" indent="0">
-              <a:lnSpc>
-                <a:spcPct val="120000"/>
-              </a:lnSpc>
-              <a:spcBef>
-                <a:spcPts val="0"/>
-              </a:spcBef>
-              <a:buNone/>
-            </a:pPr>
-            <a:r>
-              <a:rPr lang="en-US" dirty="0">
-                <a:solidFill>
-                  <a:srgbClr val="FF0000"/>
-                </a:solidFill>
-              </a:rPr>
-              <a:t>      &lt;a-sky</a:t>
-            </a:r>
-          </a:p>
-          <a:p>
-            <a:pPr marL="0" indent="0">
-              <a:lnSpc>
-                <a:spcPct val="120000"/>
-              </a:lnSpc>
-              <a:spcBef>
-                <a:spcPts val="0"/>
-              </a:spcBef>
-              <a:buNone/>
-            </a:pPr>
-            <a:r>
-              <a:rPr lang="en-US" dirty="0">
-                <a:solidFill>
-                  <a:srgbClr val="FF0000"/>
-                </a:solidFill>
-              </a:rPr>
-              <a:t>        </a:t>
-            </a:r>
-            <a:r>
-              <a:rPr lang="en-US" dirty="0" err="1">
-                <a:solidFill>
-                  <a:srgbClr val="FF0000"/>
-                </a:solidFill>
-              </a:rPr>
-              <a:t>src</a:t>
-            </a:r>
-            <a:r>
-              <a:rPr lang="en-US" dirty="0">
-                <a:solidFill>
-                  <a:srgbClr val="FF0000"/>
-                </a:solidFill>
-              </a:rPr>
-              <a:t>="https://cdn.glitch.global/4cb2dafe-67a2-4c7f-b424-b5ef32487f34/Moving_Forest_1050_700.webp?v=1696984169228"</a:t>
-            </a:r>
-          </a:p>
-          <a:p>
-            <a:pPr marL="0" indent="0">
-              <a:lnSpc>
-                <a:spcPct val="120000"/>
-              </a:lnSpc>
-              <a:spcBef>
-                <a:spcPts val="0"/>
-              </a:spcBef>
-              <a:buNone/>
-            </a:pPr>
-            <a:r>
-              <a:rPr lang="en-US" dirty="0">
-                <a:solidFill>
-                  <a:srgbClr val="FF0000"/>
-                </a:solidFill>
-              </a:rPr>
-              <a:t>       &gt;</a:t>
-            </a:r>
-          </a:p>
-          <a:p>
-            <a:pPr marL="0" indent="0">
-              <a:lnSpc>
-                <a:spcPct val="120000"/>
-              </a:lnSpc>
-              <a:spcBef>
-                <a:spcPts val="0"/>
-              </a:spcBef>
-              <a:buNone/>
-            </a:pPr>
-            <a:r>
-              <a:rPr lang="en-US" dirty="0">
-                <a:solidFill>
-                  <a:srgbClr val="FF0000"/>
-                </a:solidFill>
-              </a:rPr>
-              <a:t>      &lt;/a-sky&gt;</a:t>
-            </a:r>
-          </a:p>
-          <a:p>
-            <a:pPr marL="0" indent="0">
-              <a:lnSpc>
-                <a:spcPct val="120000"/>
-              </a:lnSpc>
-              <a:spcBef>
-                <a:spcPts val="0"/>
-              </a:spcBef>
-              <a:buNone/>
-            </a:pPr>
-            <a:r>
-              <a:rPr lang="en-US" dirty="0"/>
-              <a:t>      </a:t>
-            </a:r>
-            <a:r>
-              <a:rPr lang="en-US" dirty="0">
-                <a:solidFill>
-                  <a:schemeClr val="accent1"/>
-                </a:solidFill>
-              </a:rPr>
-              <a:t>&lt;a-text</a:t>
-            </a:r>
-          </a:p>
-          <a:p>
-            <a:pPr marL="0" indent="0">
-              <a:lnSpc>
-                <a:spcPct val="120000"/>
-              </a:lnSpc>
-              <a:spcBef>
-                <a:spcPts val="0"/>
-              </a:spcBef>
-              <a:buNone/>
-            </a:pPr>
-            <a:r>
-              <a:rPr lang="en-US" dirty="0">
-                <a:solidFill>
-                  <a:schemeClr val="accent1"/>
-                </a:solidFill>
-              </a:rPr>
-              <a:t>        font="</a:t>
-            </a:r>
-            <a:r>
-              <a:rPr lang="en-US" dirty="0" err="1">
-                <a:solidFill>
-                  <a:schemeClr val="accent1"/>
-                </a:solidFill>
-              </a:rPr>
-              <a:t>kelsonsans</a:t>
-            </a:r>
-            <a:r>
-              <a:rPr lang="en-US" dirty="0">
-                <a:solidFill>
-                  <a:schemeClr val="accent1"/>
-                </a:solidFill>
-              </a:rPr>
-              <a:t>"</a:t>
-            </a:r>
-          </a:p>
-          <a:p>
-            <a:pPr marL="0" indent="0">
-              <a:lnSpc>
-                <a:spcPct val="120000"/>
-              </a:lnSpc>
-              <a:spcBef>
-                <a:spcPts val="0"/>
-              </a:spcBef>
-              <a:buNone/>
-            </a:pPr>
-            <a:r>
-              <a:rPr lang="en-US" dirty="0">
-                <a:solidFill>
-                  <a:schemeClr val="accent1"/>
-                </a:solidFill>
-              </a:rPr>
-              <a:t>        value="HELLO A-Frame from Earth!!!"</a:t>
-            </a:r>
-          </a:p>
-          <a:p>
-            <a:pPr marL="0" indent="0">
-              <a:lnSpc>
-                <a:spcPct val="120000"/>
-              </a:lnSpc>
-              <a:spcBef>
-                <a:spcPts val="0"/>
-              </a:spcBef>
-              <a:buNone/>
-            </a:pPr>
-            <a:r>
-              <a:rPr lang="en-US" dirty="0">
-                <a:solidFill>
-                  <a:schemeClr val="accent1"/>
-                </a:solidFill>
-              </a:rPr>
-              <a:t>        width="6"</a:t>
-            </a:r>
-          </a:p>
-          <a:p>
-            <a:pPr marL="0" indent="0">
-              <a:lnSpc>
-                <a:spcPct val="120000"/>
-              </a:lnSpc>
-              <a:spcBef>
-                <a:spcPts val="0"/>
-              </a:spcBef>
-              <a:buNone/>
-            </a:pPr>
-            <a:r>
-              <a:rPr lang="en-US" dirty="0">
-                <a:solidFill>
-                  <a:schemeClr val="accent1"/>
-                </a:solidFill>
-              </a:rPr>
-              <a:t>        position="-2.5   0.25  -1.5"</a:t>
-            </a:r>
-          </a:p>
-          <a:p>
-            <a:pPr marL="0" indent="0">
-              <a:lnSpc>
-                <a:spcPct val="120000"/>
-              </a:lnSpc>
-              <a:spcBef>
-                <a:spcPts val="0"/>
-              </a:spcBef>
-              <a:buNone/>
-            </a:pPr>
-            <a:r>
-              <a:rPr lang="en-US" dirty="0">
-                <a:solidFill>
-                  <a:schemeClr val="accent1"/>
-                </a:solidFill>
-              </a:rPr>
-              <a:t>      &gt;&lt;/a-text&gt;</a:t>
-            </a:r>
-          </a:p>
-          <a:p>
-            <a:pPr marL="0" indent="0">
-              <a:lnSpc>
-                <a:spcPct val="120000"/>
-              </a:lnSpc>
-              <a:spcBef>
-                <a:spcPts val="0"/>
-              </a:spcBef>
-              <a:buNone/>
-            </a:pPr>
-            <a:r>
-              <a:rPr lang="en-US" dirty="0"/>
-              <a:t>    &lt;/a-scene&gt;</a:t>
-            </a:r>
-          </a:p>
-          <a:p>
-            <a:pPr marL="0" indent="0">
-              <a:lnSpc>
-                <a:spcPct val="120000"/>
-              </a:lnSpc>
-              <a:spcBef>
-                <a:spcPts val="0"/>
-              </a:spcBef>
-              <a:buNone/>
-            </a:pPr>
-            <a:r>
-              <a:rPr lang="en-US" dirty="0"/>
-              <a:t>  &lt;/body&gt;</a:t>
-            </a:r>
-          </a:p>
-          <a:p>
-            <a:pPr marL="0" indent="0">
-              <a:lnSpc>
-                <a:spcPct val="120000"/>
-              </a:lnSpc>
-              <a:spcBef>
-                <a:spcPts val="0"/>
-              </a:spcBef>
-              <a:buNone/>
-            </a:pPr>
-            <a:r>
-              <a:rPr lang="en-US" dirty="0"/>
-              <a:t>&lt;/html&gt;</a:t>
-            </a:r>
-          </a:p>
-        </p:txBody>
-      </p:sp>
-    </p:spTree>
-    <p:extLst>
-      <p:ext uri="{BB962C8B-B14F-4D97-AF65-F5344CB8AC3E}">
-        <p14:creationId xmlns:p14="http://schemas.microsoft.com/office/powerpoint/2010/main" val="1971297461"/>
-      </p:ext>
-    </p:extLst>
-  </p:cSld>
-  <p:clrMapOvr>
-    <a:masterClrMapping/>
-  </p:clrMapOvr>
-</p:sld>
-</file>
-
-<file path=ppt/slides/slide21.xml><?xml version="1.0" encoding="utf-8"?>
+<file path=ppt/slides/slide14.xml><?xml version="1.0" encoding="utf-8"?>
 <p:sld xmlns:a="http://schemas.openxmlformats.org/drawingml/2006/main" xmlns:r="http://schemas.openxmlformats.org/officeDocument/2006/relationships" xmlns:p="http://schemas.openxmlformats.org/presentationml/2006/main">
   <p:cSld>
     <p:spTree>
@@ -11569,7 +9568,7 @@
 </p:sld>
 </file>
 
-<file path=ppt/slides/slide22.xml><?xml version="1.0" encoding="utf-8"?>
+<file path=ppt/slides/slide15.xml><?xml version="1.0" encoding="utf-8"?>
 <p:sld xmlns:a="http://schemas.openxmlformats.org/drawingml/2006/main" xmlns:r="http://schemas.openxmlformats.org/officeDocument/2006/relationships" xmlns:p="http://schemas.openxmlformats.org/presentationml/2006/main">
   <p:cSld>
     <p:spTree>
@@ -11628,7 +9627,7 @@
 </p:sld>
 </file>
 
-<file path=ppt/slides/slide23.xml><?xml version="1.0" encoding="utf-8"?>
+<file path=ppt/slides/slide16.xml><?xml version="1.0" encoding="utf-8"?>
 <p:sld xmlns:a="http://schemas.openxmlformats.org/drawingml/2006/main" xmlns:r="http://schemas.openxmlformats.org/officeDocument/2006/relationships" xmlns:p="http://schemas.openxmlformats.org/presentationml/2006/main">
   <p:cSld>
     <p:spTree>
@@ -11856,7 +9855,7 @@
 </p:sld>
 </file>
 
-<file path=ppt/slides/slide24.xml><?xml version="1.0" encoding="utf-8"?>
+<file path=ppt/slides/slide17.xml><?xml version="1.0" encoding="utf-8"?>
 <p:sld xmlns:a="http://schemas.openxmlformats.org/drawingml/2006/main" xmlns:r="http://schemas.openxmlformats.org/officeDocument/2006/relationships" xmlns:p="http://schemas.openxmlformats.org/presentationml/2006/main">
   <p:cSld>
     <p:spTree>
@@ -12091,6 +10090,167 @@
     <p:extLst>
       <p:ext uri="{BB962C8B-B14F-4D97-AF65-F5344CB8AC3E}">
         <p14:creationId xmlns:p14="http://schemas.microsoft.com/office/powerpoint/2010/main" val="1984120763"/>
+      </p:ext>
+    </p:extLst>
+  </p:cSld>
+  <p:clrMapOvr>
+    <a:masterClrMapping/>
+  </p:clrMapOvr>
+</p:sld>
+</file>
+
+<file path=ppt/slides/slide2.xml><?xml version="1.0" encoding="utf-8"?>
+<p:sld xmlns:a="http://schemas.openxmlformats.org/drawingml/2006/main" xmlns:r="http://schemas.openxmlformats.org/officeDocument/2006/relationships" xmlns:p="http://schemas.openxmlformats.org/presentationml/2006/main">
+  <p:cSld>
+    <p:spTree>
+      <p:nvGrpSpPr>
+        <p:cNvPr id="1" name=""/>
+        <p:cNvGrpSpPr/>
+        <p:nvPr/>
+      </p:nvGrpSpPr>
+      <p:grpSpPr>
+        <a:xfrm>
+          <a:off x="0" y="0"/>
+          <a:ext cx="0" cy="0"/>
+          <a:chOff x="0" y="0"/>
+          <a:chExt cx="0" cy="0"/>
+        </a:xfrm>
+      </p:grpSpPr>
+      <p:sp>
+        <p:nvSpPr>
+          <p:cNvPr id="2" name="Title 1">
+            <a:extLst>
+              <a:ext uri="{FF2B5EF4-FFF2-40B4-BE49-F238E27FC236}">
+                <a16:creationId xmlns:a16="http://schemas.microsoft.com/office/drawing/2014/main" id="{CCEF71E3-E69E-435D-7B1B-207FBC952569}"/>
+              </a:ext>
+            </a:extLst>
+          </p:cNvPr>
+          <p:cNvSpPr>
+            <a:spLocks noGrp="1"/>
+          </p:cNvSpPr>
+          <p:nvPr>
+            <p:ph type="title"/>
+          </p:nvPr>
+        </p:nvSpPr>
+        <p:spPr/>
+        <p:txBody>
+          <a:bodyPr/>
+          <a:lstStyle/>
+          <a:p>
+            <a:r>
+              <a:rPr lang="en-US" dirty="0"/>
+              <a:t>Full select demo – how you can do …</a:t>
+            </a:r>
+          </a:p>
+        </p:txBody>
+      </p:sp>
+      <p:sp>
+        <p:nvSpPr>
+          <p:cNvPr id="3" name="Rectangle 2">
+            <a:extLst>
+              <a:ext uri="{FF2B5EF4-FFF2-40B4-BE49-F238E27FC236}">
+                <a16:creationId xmlns:a16="http://schemas.microsoft.com/office/drawing/2014/main" id="{B18A33C3-76E0-66B5-AC60-6763DB8A1017}"/>
+              </a:ext>
+            </a:extLst>
+          </p:cNvPr>
+          <p:cNvSpPr/>
+          <p:nvPr/>
+        </p:nvSpPr>
+        <p:spPr>
+          <a:xfrm>
+            <a:off x="3647550" y="4618445"/>
+            <a:ext cx="5712489" cy="1325563"/>
+          </a:xfrm>
+          <a:prstGeom prst="rect">
+            <a:avLst/>
+          </a:prstGeom>
+        </p:spPr>
+        <p:style>
+          <a:lnRef idx="2">
+            <a:schemeClr val="accent1">
+              <a:shade val="15000"/>
+            </a:schemeClr>
+          </a:lnRef>
+          <a:fillRef idx="1">
+            <a:schemeClr val="accent1"/>
+          </a:fillRef>
+          <a:effectRef idx="0">
+            <a:schemeClr val="accent1"/>
+          </a:effectRef>
+          <a:fontRef idx="minor">
+            <a:schemeClr val="lt1"/>
+          </a:fontRef>
+        </p:style>
+        <p:txBody>
+          <a:bodyPr rtlCol="0" anchor="ctr"/>
+          <a:lstStyle/>
+          <a:p>
+            <a:pPr algn="ctr"/>
+            <a:endParaRPr lang="en-US" dirty="0"/>
+          </a:p>
+          <a:p>
+            <a:pPr algn="ctr"/>
+            <a:r>
+              <a:rPr lang="en-US" dirty="0">
+                <a:solidFill>
+                  <a:schemeClr val="bg1"/>
+                </a:solidFill>
+                <a:hlinkClick r:id="rId2">
+                  <a:extLst>
+                    <a:ext uri="{A12FA001-AC4F-418D-AE19-62706E023703}">
+                      <ahyp:hlinkClr xmlns:ahyp="http://schemas.microsoft.com/office/drawing/2018/hyperlinkcolor" val="tx"/>
+                    </a:ext>
+                  </a:extLst>
+                </a:hlinkClick>
+              </a:rPr>
+              <a:t>Basic-Mars-Landing</a:t>
+            </a:r>
+            <a:endParaRPr lang="en-US" dirty="0">
+              <a:solidFill>
+                <a:schemeClr val="bg1"/>
+              </a:solidFill>
+            </a:endParaRPr>
+          </a:p>
+          <a:p>
+            <a:pPr algn="ctr"/>
+            <a:endParaRPr lang="en-US" dirty="0"/>
+          </a:p>
+        </p:txBody>
+      </p:sp>
+      <p:pic>
+        <p:nvPicPr>
+          <p:cNvPr id="5" name="Picture 4">
+            <a:extLst>
+              <a:ext uri="{FF2B5EF4-FFF2-40B4-BE49-F238E27FC236}">
+                <a16:creationId xmlns:a16="http://schemas.microsoft.com/office/drawing/2014/main" id="{CC2EEE88-7DBD-3B16-1AA0-B23E0B83B28A}"/>
+              </a:ext>
+            </a:extLst>
+          </p:cNvPr>
+          <p:cNvPicPr>
+            <a:picLocks noChangeAspect="1"/>
+          </p:cNvPicPr>
+          <p:nvPr/>
+        </p:nvPicPr>
+        <p:blipFill>
+          <a:blip r:embed="rId3"/>
+          <a:stretch>
+            <a:fillRect/>
+          </a:stretch>
+        </p:blipFill>
+        <p:spPr>
+          <a:xfrm>
+            <a:off x="5138330" y="1887134"/>
+            <a:ext cx="2473296" cy="2473296"/>
+          </a:xfrm>
+          <a:prstGeom prst="rect">
+            <a:avLst/>
+          </a:prstGeom>
+        </p:spPr>
+      </p:pic>
+    </p:spTree>
+    <p:extLst>
+      <p:ext uri="{BB962C8B-B14F-4D97-AF65-F5344CB8AC3E}">
+        <p14:creationId xmlns:p14="http://schemas.microsoft.com/office/powerpoint/2010/main" val="3177984982"/>
       </p:ext>
     </p:extLst>
   </p:cSld>
@@ -12837,18 +10997,18 @@
             </a:pPr>
             <a:r>
               <a:rPr lang="en-US" dirty="0"/>
-              <a:t>To get started, get a free account on </a:t>
-            </a:r>
-            <a:r>
-              <a:rPr lang="en-US" b="1" dirty="0"/>
-              <a:t>Glitch.com </a:t>
-            </a:r>
-          </a:p>
-          <a:p>
-            <a:pPr marL="0" indent="0">
-              <a:buNone/>
-            </a:pPr>
-            <a:endParaRPr lang="en-US" dirty="0"/>
+              <a:t>	Clone </a:t>
+            </a:r>
+            <a:r>
+              <a:rPr lang="en-US" dirty="0">
+                <a:hlinkClick r:id="rId2"/>
+              </a:rPr>
+              <a:t>https://github.com/wonder-phil/wonder-phil.github.io.git</a:t>
+            </a:r>
+            <a:r>
+              <a:rPr lang="en-US" dirty="0"/>
+              <a:t> </a:t>
+            </a:r>
           </a:p>
         </p:txBody>
       </p:sp>
@@ -12866,171 +11026,6 @@
 </file>
 
 <file path=ppt/slides/slide8.xml><?xml version="1.0" encoding="utf-8"?>
-<p:sld xmlns:a="http://schemas.openxmlformats.org/drawingml/2006/main" xmlns:r="http://schemas.openxmlformats.org/officeDocument/2006/relationships" xmlns:p="http://schemas.openxmlformats.org/presentationml/2006/main">
-  <p:cSld>
-    <p:spTree>
-      <p:nvGrpSpPr>
-        <p:cNvPr id="1" name=""/>
-        <p:cNvGrpSpPr/>
-        <p:nvPr/>
-      </p:nvGrpSpPr>
-      <p:grpSpPr>
-        <a:xfrm>
-          <a:off x="0" y="0"/>
-          <a:ext cx="0" cy="0"/>
-          <a:chOff x="0" y="0"/>
-          <a:chExt cx="0" cy="0"/>
-        </a:xfrm>
-      </p:grpSpPr>
-      <p:sp>
-        <p:nvSpPr>
-          <p:cNvPr id="2" name="Title 1">
-            <a:extLst>
-              <a:ext uri="{FF2B5EF4-FFF2-40B4-BE49-F238E27FC236}">
-                <a16:creationId xmlns:a16="http://schemas.microsoft.com/office/drawing/2014/main" id="{C50D908A-40CF-81A8-518C-8321CFDE491B}"/>
-              </a:ext>
-            </a:extLst>
-          </p:cNvPr>
-          <p:cNvSpPr>
-            <a:spLocks noGrp="1"/>
-          </p:cNvSpPr>
-          <p:nvPr>
-            <p:ph type="title"/>
-          </p:nvPr>
-        </p:nvSpPr>
-        <p:spPr/>
-        <p:txBody>
-          <a:bodyPr/>
-          <a:lstStyle/>
-          <a:p>
-            <a:r>
-              <a:rPr lang="en-US" b="1" dirty="0">
-                <a:solidFill>
-                  <a:schemeClr val="accent5">
-                    <a:lumMod val="75000"/>
-                  </a:schemeClr>
-                </a:solidFill>
-                <a:ea typeface="Calibri" panose="020F0502020204030204"/>
-                <a:cs typeface="Calibri" panose="020F0502020204030204"/>
-              </a:rPr>
-              <a:t>What is glitch?</a:t>
-            </a:r>
-            <a:endParaRPr lang="en-US" b="1" dirty="0">
-              <a:solidFill>
-                <a:schemeClr val="accent5">
-                  <a:lumMod val="75000"/>
-                </a:schemeClr>
-              </a:solidFill>
-            </a:endParaRPr>
-          </a:p>
-        </p:txBody>
-      </p:sp>
-      <p:sp>
-        <p:nvSpPr>
-          <p:cNvPr id="3" name="Content Placeholder 2">
-            <a:extLst>
-              <a:ext uri="{FF2B5EF4-FFF2-40B4-BE49-F238E27FC236}">
-                <a16:creationId xmlns:a16="http://schemas.microsoft.com/office/drawing/2014/main" id="{2F5A93A9-D42A-2835-1AFE-6FC2734D9DF0}"/>
-              </a:ext>
-            </a:extLst>
-          </p:cNvPr>
-          <p:cNvSpPr>
-            <a:spLocks noGrp="1"/>
-          </p:cNvSpPr>
-          <p:nvPr>
-            <p:ph idx="1"/>
-          </p:nvPr>
-        </p:nvSpPr>
-        <p:spPr/>
-        <p:txBody>
-          <a:bodyPr/>
-          <a:lstStyle/>
-          <a:p>
-            <a:pPr marL="0" indent="0">
-              <a:buNone/>
-            </a:pPr>
-            <a:r>
-              <a:rPr lang="en-US" dirty="0"/>
-              <a:t>Cloud-based development environment</a:t>
-            </a:r>
-          </a:p>
-          <a:p>
-            <a:pPr marL="0" indent="0">
-              <a:buNone/>
-            </a:pPr>
-            <a:endParaRPr lang="en-US" dirty="0"/>
-          </a:p>
-          <a:p>
-            <a:pPr marL="0" indent="0">
-              <a:buNone/>
-            </a:pPr>
-            <a:r>
-              <a:rPr lang="en-US" dirty="0"/>
-              <a:t>Fast development</a:t>
-            </a:r>
-          </a:p>
-          <a:p>
-            <a:pPr marL="0" indent="0">
-              <a:buNone/>
-            </a:pPr>
-            <a:endParaRPr lang="en-US" dirty="0"/>
-          </a:p>
-          <a:p>
-            <a:pPr marL="0" indent="0">
-              <a:buNone/>
-            </a:pPr>
-            <a:r>
-              <a:rPr lang="en-US" dirty="0"/>
-              <a:t>Gives you a URL for each project</a:t>
-            </a:r>
-          </a:p>
-          <a:p>
-            <a:pPr marL="0" indent="0">
-              <a:buNone/>
-            </a:pPr>
-            <a:endParaRPr lang="en-US" dirty="0"/>
-          </a:p>
-          <a:p>
-            <a:pPr marL="0" indent="0">
-              <a:buNone/>
-            </a:pPr>
-            <a:r>
-              <a:rPr lang="en-US" b="1" dirty="0">
-                <a:ea typeface="Calibri" panose="020F0502020204030204"/>
-                <a:cs typeface="Calibri" panose="020F0502020204030204"/>
-              </a:rPr>
-              <a:t>A-Frame</a:t>
-            </a:r>
-            <a:r>
-              <a:rPr lang="en-US" dirty="0">
-                <a:ea typeface="Calibri" panose="020F0502020204030204"/>
-                <a:cs typeface="Calibri" panose="020F0502020204030204"/>
-              </a:rPr>
-              <a:t> is run through the on-line glitch environment</a:t>
-            </a:r>
-          </a:p>
-          <a:p>
-            <a:pPr marL="0" indent="0">
-              <a:buNone/>
-            </a:pPr>
-            <a:endParaRPr lang="en-US" dirty="0"/>
-          </a:p>
-        </p:txBody>
-      </p:sp>
-    </p:spTree>
-    <p:extLst>
-      <p:ext uri="{BB962C8B-B14F-4D97-AF65-F5344CB8AC3E}">
-        <p14:creationId xmlns:p14="http://schemas.microsoft.com/office/powerpoint/2010/main" val="364725463"/>
-      </p:ext>
-    </p:extLst>
-  </p:cSld>
-  <p:clrMapOvr>
-    <a:masterClrMapping/>
-  </p:clrMapOvr>
-</p:sld>
-</file>
-
-<file path=ppt/slides/slide9.xml><?xml version="1.0" encoding="utf-8"?>
 <p:sld xmlns:a="http://schemas.openxmlformats.org/drawingml/2006/main" xmlns:r="http://schemas.openxmlformats.org/officeDocument/2006/relationships" xmlns:p="http://schemas.openxmlformats.org/presentationml/2006/main">
   <p:cSld>
     <p:spTree>
@@ -13079,7 +11074,7 @@
                 <a:ea typeface="Calibri"/>
                 <a:cs typeface="Calibri"/>
               </a:rPr>
-              <a:t>Glitch.com Overview</a:t>
+              <a:t>Overview</a:t>
             </a:r>
           </a:p>
         </p:txBody>
@@ -13235,8 +11230,12 @@
           <a:p>
             <a:pPr algn="ctr"/>
             <a:r>
+              <a:rPr lang="en-US" dirty="0" err="1"/>
+              <a:t>Github</a:t>
+            </a:r>
+            <a:r>
               <a:rPr lang="en-US" dirty="0"/>
-              <a:t>Glitch.com</a:t>
+              <a:t> pages</a:t>
             </a:r>
           </a:p>
         </p:txBody>
@@ -13420,8 +11419,12 @@
           <a:p>
             <a:pPr algn="ctr"/>
             <a:r>
+              <a:rPr lang="en-US" dirty="0" err="1"/>
+              <a:t>Github</a:t>
+            </a:r>
+            <a:r>
               <a:rPr lang="en-US" dirty="0"/>
-              <a:t>Glitch.com</a:t>
+              <a:t> pages</a:t>
             </a:r>
           </a:p>
         </p:txBody>
@@ -13430,6 +11433,214 @@
     <p:extLst>
       <p:ext uri="{BB962C8B-B14F-4D97-AF65-F5344CB8AC3E}">
         <p14:creationId xmlns:p14="http://schemas.microsoft.com/office/powerpoint/2010/main" val="2082233066"/>
+      </p:ext>
+    </p:extLst>
+  </p:cSld>
+  <p:clrMapOvr>
+    <a:masterClrMapping/>
+  </p:clrMapOvr>
+</p:sld>
+</file>
+
+<file path=ppt/slides/slide9.xml><?xml version="1.0" encoding="utf-8"?>
+<p:sld xmlns:a="http://schemas.openxmlformats.org/drawingml/2006/main" xmlns:r="http://schemas.openxmlformats.org/officeDocument/2006/relationships" xmlns:p="http://schemas.openxmlformats.org/presentationml/2006/main">
+  <p:cSld>
+    <p:spTree>
+      <p:nvGrpSpPr>
+        <p:cNvPr id="1" name=""/>
+        <p:cNvGrpSpPr/>
+        <p:nvPr/>
+      </p:nvGrpSpPr>
+      <p:grpSpPr>
+        <a:xfrm>
+          <a:off x="0" y="0"/>
+          <a:ext cx="0" cy="0"/>
+          <a:chOff x="0" y="0"/>
+          <a:chExt cx="0" cy="0"/>
+        </a:xfrm>
+      </p:grpSpPr>
+      <p:sp>
+        <p:nvSpPr>
+          <p:cNvPr id="2" name="Title 1">
+            <a:extLst>
+              <a:ext uri="{FF2B5EF4-FFF2-40B4-BE49-F238E27FC236}">
+                <a16:creationId xmlns:a16="http://schemas.microsoft.com/office/drawing/2014/main" id="{D27F1D3F-E19A-86B4-8570-4E6383C32976}"/>
+              </a:ext>
+            </a:extLst>
+          </p:cNvPr>
+          <p:cNvSpPr>
+            <a:spLocks noGrp="1"/>
+          </p:cNvSpPr>
+          <p:nvPr>
+            <p:ph type="title"/>
+          </p:nvPr>
+        </p:nvSpPr>
+        <p:spPr/>
+        <p:txBody>
+          <a:bodyPr/>
+          <a:lstStyle/>
+          <a:p>
+            <a:r>
+              <a:rPr lang="en-US" b="1" dirty="0">
+                <a:solidFill>
+                  <a:schemeClr val="accent5">
+                    <a:lumMod val="75000"/>
+                  </a:schemeClr>
+                </a:solidFill>
+              </a:rPr>
+              <a:t>Basic HTML</a:t>
+            </a:r>
+          </a:p>
+        </p:txBody>
+      </p:sp>
+      <p:sp>
+        <p:nvSpPr>
+          <p:cNvPr id="3" name="Content Placeholder 2">
+            <a:extLst>
+              <a:ext uri="{FF2B5EF4-FFF2-40B4-BE49-F238E27FC236}">
+                <a16:creationId xmlns:a16="http://schemas.microsoft.com/office/drawing/2014/main" id="{8554C0A5-CBB2-9A5D-2B3F-8C8C01B34A08}"/>
+              </a:ext>
+            </a:extLst>
+          </p:cNvPr>
+          <p:cNvSpPr>
+            <a:spLocks noGrp="1"/>
+          </p:cNvSpPr>
+          <p:nvPr>
+            <p:ph idx="1"/>
+          </p:nvPr>
+        </p:nvSpPr>
+        <p:spPr/>
+        <p:txBody>
+          <a:bodyPr>
+            <a:normAutofit/>
+          </a:bodyPr>
+          <a:lstStyle/>
+          <a:p>
+            <a:pPr marL="0" indent="0">
+              <a:buNone/>
+            </a:pPr>
+            <a:r>
+              <a:rPr lang="en-US" b="1" dirty="0">
+                <a:solidFill>
+                  <a:schemeClr val="accent5">
+                    <a:lumMod val="75000"/>
+                  </a:schemeClr>
+                </a:solidFill>
+              </a:rPr>
+              <a:t>&lt;html&gt;</a:t>
+            </a:r>
+          </a:p>
+          <a:p>
+            <a:pPr marL="0" indent="0">
+              <a:buNone/>
+            </a:pPr>
+            <a:r>
+              <a:rPr lang="en-US" b="1" dirty="0">
+                <a:solidFill>
+                  <a:schemeClr val="accent5">
+                    <a:lumMod val="75000"/>
+                  </a:schemeClr>
+                </a:solidFill>
+              </a:rPr>
+              <a:t>  &lt;head&gt;</a:t>
+            </a:r>
+          </a:p>
+          <a:p>
+            <a:pPr marL="0" indent="0">
+              <a:buNone/>
+            </a:pPr>
+            <a:r>
+              <a:rPr lang="en-US" b="1" dirty="0">
+                <a:solidFill>
+                  <a:schemeClr val="accent5">
+                    <a:lumMod val="75000"/>
+                  </a:schemeClr>
+                </a:solidFill>
+              </a:rPr>
+              <a:t>    </a:t>
+            </a:r>
+          </a:p>
+          <a:p>
+            <a:pPr marL="0" indent="0">
+              <a:buNone/>
+            </a:pPr>
+            <a:r>
+              <a:rPr lang="en-US" b="1" dirty="0">
+                <a:solidFill>
+                  <a:schemeClr val="accent5">
+                    <a:lumMod val="75000"/>
+                  </a:schemeClr>
+                </a:solidFill>
+              </a:rPr>
+              <a:t>  &lt;/head&gt;</a:t>
+            </a:r>
+          </a:p>
+          <a:p>
+            <a:pPr marL="0" indent="0">
+              <a:buNone/>
+            </a:pPr>
+            <a:r>
+              <a:rPr lang="en-US" b="1" dirty="0">
+                <a:solidFill>
+                  <a:schemeClr val="accent5">
+                    <a:lumMod val="75000"/>
+                  </a:schemeClr>
+                </a:solidFill>
+              </a:rPr>
+              <a:t>  &lt;body&gt;</a:t>
+            </a:r>
+          </a:p>
+          <a:p>
+            <a:pPr marL="0" indent="0">
+              <a:buNone/>
+            </a:pPr>
+            <a:r>
+              <a:rPr lang="en-US" b="1" dirty="0">
+                <a:solidFill>
+                  <a:schemeClr val="accent5">
+                    <a:lumMod val="75000"/>
+                  </a:schemeClr>
+                </a:solidFill>
+              </a:rPr>
+              <a:t>    </a:t>
+            </a:r>
+          </a:p>
+          <a:p>
+            <a:pPr marL="0" indent="0">
+              <a:buNone/>
+            </a:pPr>
+            <a:r>
+              <a:rPr lang="en-US" b="1" dirty="0">
+                <a:solidFill>
+                  <a:schemeClr val="accent5">
+                    <a:lumMod val="75000"/>
+                  </a:schemeClr>
+                </a:solidFill>
+              </a:rPr>
+              <a:t>  &lt;/body&gt;</a:t>
+            </a:r>
+          </a:p>
+          <a:p>
+            <a:pPr marL="0" indent="0">
+              <a:buNone/>
+            </a:pPr>
+            <a:r>
+              <a:rPr lang="en-US" b="1" dirty="0">
+                <a:solidFill>
+                  <a:schemeClr val="accent5">
+                    <a:lumMod val="75000"/>
+                  </a:schemeClr>
+                </a:solidFill>
+              </a:rPr>
+              <a:t>&lt;/html&gt;</a:t>
+            </a:r>
+          </a:p>
+        </p:txBody>
+      </p:sp>
+    </p:spTree>
+    <p:extLst>
+      <p:ext uri="{BB962C8B-B14F-4D97-AF65-F5344CB8AC3E}">
+        <p14:creationId xmlns:p14="http://schemas.microsoft.com/office/powerpoint/2010/main" val="225151386"/>
       </p:ext>
     </p:extLst>
   </p:cSld>
